--- a/health_dashboarrd_ppt.pptx
+++ b/health_dashboarrd_ppt.pptx
@@ -5,7 +5,7 @@
     <p:sldMasterId id="2147483648" r:id="rId1"/>
   </p:sldMasterIdLst>
   <p:notesMasterIdLst>
-    <p:notesMasterId r:id="rId13"/>
+    <p:notesMasterId r:id="rId15"/>
   </p:notesMasterIdLst>
   <p:sldIdLst>
     <p:sldId id="268" r:id="rId2"/>
@@ -15,15 +15,17 @@
     <p:sldId id="260" r:id="rId6"/>
     <p:sldId id="261" r:id="rId7"/>
     <p:sldId id="262" r:id="rId8"/>
-    <p:sldId id="263" r:id="rId9"/>
-    <p:sldId id="264" r:id="rId10"/>
-    <p:sldId id="265" r:id="rId11"/>
-    <p:sldId id="266" r:id="rId12"/>
+    <p:sldId id="269" r:id="rId9"/>
+    <p:sldId id="270" r:id="rId10"/>
+    <p:sldId id="263" r:id="rId11"/>
+    <p:sldId id="264" r:id="rId12"/>
+    <p:sldId id="265" r:id="rId13"/>
+    <p:sldId id="266" r:id="rId14"/>
   </p:sldIdLst>
   <p:sldSz cx="9144000" cy="5143500" type="screen16x9"/>
   <p:notesSz cx="5143500" cy="9144000"/>
   <p:custDataLst>
-    <p:tags r:id="rId14"/>
+    <p:tags r:id="rId16"/>
   </p:custDataLst>
   <p:defaultTextStyle>
     <a:lvl1pPr marL="0" algn="l" defTabSz="914400" rtl="0" eaLnBrk="1" latinLnBrk="0" hangingPunct="1">
@@ -144,7 +146,7 @@
 <file path=ppt/revisionInfo.xml><?xml version="1.0" encoding="utf-8"?>
 <p1510:revInfo xmlns:a="http://schemas.openxmlformats.org/drawingml/2006/main" xmlns:r="http://schemas.openxmlformats.org/officeDocument/2006/relationships" xmlns:p1510="http://schemas.microsoft.com/office/powerpoint/2015/10/main">
   <p1510:revLst>
-    <p1510:client id="{700042A6-73B7-4730-9D26-79B5773D29C5}" v="29" dt="2026-04-08T16:20:38.373"/>
+    <p1510:client id="{700042A6-73B7-4730-9D26-79B5773D29C5}" v="50" dt="2026-04-16T13:05:31.958"/>
   </p1510:revLst>
 </p1510:revInfo>
 </file>
@@ -153,39 +155,78 @@
 <pc:chgInfo xmlns:a="http://schemas.openxmlformats.org/drawingml/2006/main" xmlns:r="http://schemas.openxmlformats.org/officeDocument/2006/relationships" xmlns:ac="http://schemas.microsoft.com/office/drawing/2013/main/command" xmlns:pc="http://schemas.microsoft.com/office/powerpoint/2013/main/command">
   <pc:docChgLst>
     <pc:chgData name="Sonal Genani" userId="d1fd93578f9e8c8c" providerId="LiveId" clId="{0300D4C8-DA04-4726-B3A2-E37C61829253}"/>
-    <pc:docChg chg="undo custSel modSld">
-      <pc:chgData name="Sonal Genani" userId="d1fd93578f9e8c8c" providerId="LiveId" clId="{0300D4C8-DA04-4726-B3A2-E37C61829253}" dt="2026-04-08T16:21:16.237" v="214" actId="255"/>
+    <pc:docChg chg="undo custSel addSld modSld">
+      <pc:chgData name="Sonal Genani" userId="d1fd93578f9e8c8c" providerId="LiveId" clId="{0300D4C8-DA04-4726-B3A2-E37C61829253}" dt="2026-04-16T13:42:18.350" v="782" actId="1076"/>
       <pc:docMkLst>
         <pc:docMk/>
       </pc:docMkLst>
       <pc:sldChg chg="addSp modSp mod">
-        <pc:chgData name="Sonal Genani" userId="d1fd93578f9e8c8c" providerId="LiveId" clId="{0300D4C8-DA04-4726-B3A2-E37C61829253}" dt="2026-04-08T12:38:40.611" v="166" actId="20577"/>
+        <pc:chgData name="Sonal Genani" userId="d1fd93578f9e8c8c" providerId="LiveId" clId="{0300D4C8-DA04-4726-B3A2-E37C61829253}" dt="2026-04-16T13:34:34.376" v="767" actId="20577"/>
         <pc:sldMkLst>
           <pc:docMk/>
           <pc:sldMk cId="0" sldId="258"/>
         </pc:sldMkLst>
         <pc:spChg chg="add">
-          <ac:chgData name="Sonal Genani" userId="d1fd93578f9e8c8c" providerId="LiveId" clId="{0300D4C8-DA04-4726-B3A2-E37C61829253}" dt="2026-04-08T12:37:13.378" v="142"/>
+          <ac:chgData name="Sonal Genani" userId="d1fd93578f9e8c8c" providerId="LiveId" clId="{0300D4C8-DA04-4726-B3A2-E37C61829253}" dt="2026-04-16T12:44:13.040" v="329"/>
           <ac:spMkLst>
             <pc:docMk/>
             <pc:sldMk cId="0" sldId="258"/>
-            <ac:spMk id="3" creationId="{7B9E220D-791A-EDE0-6883-D3A6859CDE83}"/>
+            <ac:spMk id="3" creationId="{6BD57FBB-AF23-47A8-21D9-F913551C179C}"/>
+          </ac:spMkLst>
+        </pc:spChg>
+        <pc:spChg chg="add mod">
+          <ac:chgData name="Sonal Genani" userId="d1fd93578f9e8c8c" providerId="LiveId" clId="{0300D4C8-DA04-4726-B3A2-E37C61829253}" dt="2026-04-16T12:44:48.119" v="333"/>
+          <ac:spMkLst>
+            <pc:docMk/>
+            <pc:sldMk cId="0" sldId="258"/>
+            <ac:spMk id="5" creationId="{E59A0EC7-FD67-EAF9-61D8-C37AEB4A2DEC}"/>
           </ac:spMkLst>
         </pc:spChg>
         <pc:spChg chg="add">
-          <ac:chgData name="Sonal Genani" userId="d1fd93578f9e8c8c" providerId="LiveId" clId="{0300D4C8-DA04-4726-B3A2-E37C61829253}" dt="2026-04-08T12:37:26.519" v="159"/>
+          <ac:chgData name="Sonal Genani" userId="d1fd93578f9e8c8c" providerId="LiveId" clId="{0300D4C8-DA04-4726-B3A2-E37C61829253}" dt="2026-04-16T12:44:54.969" v="340"/>
           <ac:spMkLst>
             <pc:docMk/>
             <pc:sldMk cId="0" sldId="258"/>
-            <ac:spMk id="5" creationId="{638D90F8-3C0E-6ED0-5636-6F4754FC246F}"/>
+            <ac:spMk id="6" creationId="{14F19181-DC3F-3B82-31D6-E3710CAC1815}"/>
           </ac:spMkLst>
         </pc:spChg>
         <pc:spChg chg="mod">
-          <ac:chgData name="Sonal Genani" userId="d1fd93578f9e8c8c" providerId="LiveId" clId="{0300D4C8-DA04-4726-B3A2-E37C61829253}" dt="2026-04-08T12:38:40.611" v="166" actId="20577"/>
+          <ac:chgData name="Sonal Genani" userId="d1fd93578f9e8c8c" providerId="LiveId" clId="{0300D4C8-DA04-4726-B3A2-E37C61829253}" dt="2026-04-16T13:34:34.376" v="767" actId="20577"/>
           <ac:spMkLst>
             <pc:docMk/>
             <pc:sldMk cId="0" sldId="258"/>
             <ac:spMk id="7" creationId="{38849028-F25C-7DA0-DE56-0DC142EECABD}"/>
+          </ac:spMkLst>
+        </pc:spChg>
+        <pc:spChg chg="add">
+          <ac:chgData name="Sonal Genani" userId="d1fd93578f9e8c8c" providerId="LiveId" clId="{0300D4C8-DA04-4726-B3A2-E37C61829253}" dt="2026-04-16T12:46:21.463" v="420"/>
+          <ac:spMkLst>
+            <pc:docMk/>
+            <pc:sldMk cId="0" sldId="258"/>
+            <ac:spMk id="8" creationId="{4852E753-A429-15CB-9BAD-4FC58962563B}"/>
+          </ac:spMkLst>
+        </pc:spChg>
+        <pc:spChg chg="add">
+          <ac:chgData name="Sonal Genani" userId="d1fd93578f9e8c8c" providerId="LiveId" clId="{0300D4C8-DA04-4726-B3A2-E37C61829253}" dt="2026-04-16T12:46:38.671" v="421"/>
+          <ac:spMkLst>
+            <pc:docMk/>
+            <pc:sldMk cId="0" sldId="258"/>
+            <ac:spMk id="9" creationId="{9DA49390-BC4A-EBF5-B59F-3FECF0F526F7}"/>
+          </ac:spMkLst>
+        </pc:spChg>
+      </pc:sldChg>
+      <pc:sldChg chg="modSp mod">
+        <pc:chgData name="Sonal Genani" userId="d1fd93578f9e8c8c" providerId="LiveId" clId="{0300D4C8-DA04-4726-B3A2-E37C61829253}" dt="2026-04-16T13:34:00.429" v="763" actId="255"/>
+        <pc:sldMkLst>
+          <pc:docMk/>
+          <pc:sldMk cId="0" sldId="259"/>
+        </pc:sldMkLst>
+        <pc:spChg chg="mod">
+          <ac:chgData name="Sonal Genani" userId="d1fd93578f9e8c8c" providerId="LiveId" clId="{0300D4C8-DA04-4726-B3A2-E37C61829253}" dt="2026-04-16T13:34:00.429" v="763" actId="255"/>
+          <ac:spMkLst>
+            <pc:docMk/>
+            <pc:sldMk cId="0" sldId="259"/>
+            <ac:spMk id="6" creationId="{EE76AC24-5CB7-D860-6A01-E6D8ABD38610}"/>
           </ac:spMkLst>
         </pc:spChg>
       </pc:sldChg>
@@ -228,36 +269,139 @@
           </ac:spMkLst>
         </pc:spChg>
       </pc:sldChg>
+      <pc:sldChg chg="addSp delSp modSp mod">
+        <pc:chgData name="Sonal Genani" userId="d1fd93578f9e8c8c" providerId="LiveId" clId="{0300D4C8-DA04-4726-B3A2-E37C61829253}" dt="2026-04-16T13:42:05.440" v="775" actId="1076"/>
+        <pc:sldMkLst>
+          <pc:docMk/>
+          <pc:sldMk cId="0" sldId="262"/>
+        </pc:sldMkLst>
+        <pc:spChg chg="add">
+          <ac:chgData name="Sonal Genani" userId="d1fd93578f9e8c8c" providerId="LiveId" clId="{0300D4C8-DA04-4726-B3A2-E37C61829253}" dt="2026-04-16T13:22:38.828" v="729"/>
+          <ac:spMkLst>
+            <pc:docMk/>
+            <pc:sldMk cId="0" sldId="262"/>
+            <ac:spMk id="2" creationId="{40E1FB53-5D9F-560D-AF7B-A6DD3705BDC4}"/>
+          </ac:spMkLst>
+        </pc:spChg>
+        <pc:spChg chg="mod">
+          <ac:chgData name="Sonal Genani" userId="d1fd93578f9e8c8c" providerId="LiveId" clId="{0300D4C8-DA04-4726-B3A2-E37C61829253}" dt="2026-04-16T13:42:05.440" v="775" actId="1076"/>
+          <ac:spMkLst>
+            <pc:docMk/>
+            <pc:sldMk cId="0" sldId="262"/>
+            <ac:spMk id="7" creationId="{00000000-0000-0000-0000-000000000000}"/>
+          </ac:spMkLst>
+        </pc:spChg>
+        <pc:spChg chg="mod">
+          <ac:chgData name="Sonal Genani" userId="d1fd93578f9e8c8c" providerId="LiveId" clId="{0300D4C8-DA04-4726-B3A2-E37C61829253}" dt="2026-04-16T13:10:29.934" v="603" actId="14100"/>
+          <ac:spMkLst>
+            <pc:docMk/>
+            <pc:sldMk cId="0" sldId="262"/>
+            <ac:spMk id="9" creationId="{00000000-0000-0000-0000-000000000000}"/>
+          </ac:spMkLst>
+        </pc:spChg>
+        <pc:spChg chg="del">
+          <ac:chgData name="Sonal Genani" userId="d1fd93578f9e8c8c" providerId="LiveId" clId="{0300D4C8-DA04-4726-B3A2-E37C61829253}" dt="2026-04-16T13:07:13.476" v="573" actId="21"/>
+          <ac:spMkLst>
+            <pc:docMk/>
+            <pc:sldMk cId="0" sldId="262"/>
+            <ac:spMk id="12" creationId="{00000000-0000-0000-0000-000000000000}"/>
+          </ac:spMkLst>
+        </pc:spChg>
+        <pc:spChg chg="del">
+          <ac:chgData name="Sonal Genani" userId="d1fd93578f9e8c8c" providerId="LiveId" clId="{0300D4C8-DA04-4726-B3A2-E37C61829253}" dt="2026-04-16T13:05:03.447" v="558" actId="21"/>
+          <ac:spMkLst>
+            <pc:docMk/>
+            <pc:sldMk cId="0" sldId="262"/>
+            <ac:spMk id="14" creationId="{00000000-0000-0000-0000-000000000000}"/>
+          </ac:spMkLst>
+        </pc:spChg>
+        <pc:spChg chg="mod">
+          <ac:chgData name="Sonal Genani" userId="d1fd93578f9e8c8c" providerId="LiveId" clId="{0300D4C8-DA04-4726-B3A2-E37C61829253}" dt="2026-04-16T13:10:11.508" v="598" actId="20577"/>
+          <ac:spMkLst>
+            <pc:docMk/>
+            <pc:sldMk cId="0" sldId="262"/>
+            <ac:spMk id="15" creationId="{00000000-0000-0000-0000-000000000000}"/>
+          </ac:spMkLst>
+        </pc:spChg>
+        <pc:spChg chg="mod">
+          <ac:chgData name="Sonal Genani" userId="d1fd93578f9e8c8c" providerId="LiveId" clId="{0300D4C8-DA04-4726-B3A2-E37C61829253}" dt="2026-04-16T13:07:08.385" v="572" actId="20577"/>
+          <ac:spMkLst>
+            <pc:docMk/>
+            <pc:sldMk cId="0" sldId="262"/>
+            <ac:spMk id="16" creationId="{00000000-0000-0000-0000-000000000000}"/>
+          </ac:spMkLst>
+        </pc:spChg>
+        <pc:spChg chg="del">
+          <ac:chgData name="Sonal Genani" userId="d1fd93578f9e8c8c" providerId="LiveId" clId="{0300D4C8-DA04-4726-B3A2-E37C61829253}" dt="2026-04-16T13:11:39.018" v="609" actId="21"/>
+          <ac:spMkLst>
+            <pc:docMk/>
+            <pc:sldMk cId="0" sldId="262"/>
+            <ac:spMk id="17" creationId="{00000000-0000-0000-0000-000000000000}"/>
+          </ac:spMkLst>
+        </pc:spChg>
+        <pc:spChg chg="del mod">
+          <ac:chgData name="Sonal Genani" userId="d1fd93578f9e8c8c" providerId="LiveId" clId="{0300D4C8-DA04-4726-B3A2-E37C61829253}" dt="2026-04-16T13:12:07.045" v="615" actId="21"/>
+          <ac:spMkLst>
+            <pc:docMk/>
+            <pc:sldMk cId="0" sldId="262"/>
+            <ac:spMk id="19" creationId="{00000000-0000-0000-0000-000000000000}"/>
+          </ac:spMkLst>
+        </pc:spChg>
+        <pc:spChg chg="mod">
+          <ac:chgData name="Sonal Genani" userId="d1fd93578f9e8c8c" providerId="LiveId" clId="{0300D4C8-DA04-4726-B3A2-E37C61829253}" dt="2026-04-16T13:14:54.693" v="633" actId="20577"/>
+          <ac:spMkLst>
+            <pc:docMk/>
+            <pc:sldMk cId="0" sldId="262"/>
+            <ac:spMk id="20" creationId="{00000000-0000-0000-0000-000000000000}"/>
+          </ac:spMkLst>
+        </pc:spChg>
+        <pc:spChg chg="mod">
+          <ac:chgData name="Sonal Genani" userId="d1fd93578f9e8c8c" providerId="LiveId" clId="{0300D4C8-DA04-4726-B3A2-E37C61829253}" dt="2026-04-16T13:23:31.451" v="735" actId="14100"/>
+          <ac:spMkLst>
+            <pc:docMk/>
+            <pc:sldMk cId="0" sldId="262"/>
+            <ac:spMk id="21" creationId="{00000000-0000-0000-0000-000000000000}"/>
+          </ac:spMkLst>
+        </pc:spChg>
+        <pc:picChg chg="add del mod modCrop">
+          <ac:chgData name="Sonal Genani" userId="d1fd93578f9e8c8c" providerId="LiveId" clId="{0300D4C8-DA04-4726-B3A2-E37C61829253}" dt="2026-04-16T13:41:39.382" v="771" actId="931"/>
+          <ac:picMkLst>
+            <pc:docMk/>
+            <pc:sldMk cId="0" sldId="262"/>
+            <ac:picMk id="5" creationId="{4B271CC5-2872-C12F-00A3-CA988E8EB161}"/>
+          </ac:picMkLst>
+        </pc:picChg>
+        <pc:picChg chg="del mod">
+          <ac:chgData name="Sonal Genani" userId="d1fd93578f9e8c8c" providerId="LiveId" clId="{0300D4C8-DA04-4726-B3A2-E37C61829253}" dt="2026-04-16T13:05:25.576" v="562" actId="21"/>
+          <ac:picMkLst>
+            <pc:docMk/>
+            <pc:sldMk cId="0" sldId="262"/>
+            <ac:picMk id="8" creationId="{1E55E186-77CA-90F3-CE2B-D9091070E225}"/>
+          </ac:picMkLst>
+        </pc:picChg>
+        <pc:picChg chg="mod">
+          <ac:chgData name="Sonal Genani" userId="d1fd93578f9e8c8c" providerId="LiveId" clId="{0300D4C8-DA04-4726-B3A2-E37C61829253}" dt="2026-04-16T13:41:57.716" v="774" actId="14100"/>
+          <ac:picMkLst>
+            <pc:docMk/>
+            <pc:sldMk cId="0" sldId="262"/>
+            <ac:picMk id="22" creationId="{A4C3C6A9-7D01-B88E-52A1-E55CC02BB0C7}"/>
+          </ac:picMkLst>
+        </pc:picChg>
+        <pc:picChg chg="del mod">
+          <ac:chgData name="Sonal Genani" userId="d1fd93578f9e8c8c" providerId="LiveId" clId="{0300D4C8-DA04-4726-B3A2-E37C61829253}" dt="2026-04-16T13:13:45.803" v="618" actId="21"/>
+          <ac:picMkLst>
+            <pc:docMk/>
+            <pc:sldMk cId="0" sldId="262"/>
+            <ac:picMk id="24" creationId="{DEDD8881-5B15-C9E0-47F3-23BBA4E89D4E}"/>
+          </ac:picMkLst>
+        </pc:picChg>
+      </pc:sldChg>
       <pc:sldChg chg="addSp delSp modSp mod delAnim">
         <pc:chgData name="Sonal Genani" userId="d1fd93578f9e8c8c" providerId="LiveId" clId="{0300D4C8-DA04-4726-B3A2-E37C61829253}" dt="2026-04-08T16:21:16.237" v="214" actId="255"/>
         <pc:sldMkLst>
           <pc:docMk/>
           <pc:sldMk cId="0" sldId="263"/>
         </pc:sldMkLst>
-        <pc:spChg chg="add mod">
-          <ac:chgData name="Sonal Genani" userId="d1fd93578f9e8c8c" providerId="LiveId" clId="{0300D4C8-DA04-4726-B3A2-E37C61829253}" dt="2026-04-08T16:20:21.920" v="209"/>
-          <ac:spMkLst>
-            <pc:docMk/>
-            <pc:sldMk cId="0" sldId="263"/>
-            <ac:spMk id="3" creationId="{00000000-0000-0000-0000-000000000000}"/>
-          </ac:spMkLst>
-        </pc:spChg>
-        <pc:spChg chg="add mod">
-          <ac:chgData name="Sonal Genani" userId="d1fd93578f9e8c8c" providerId="LiveId" clId="{0300D4C8-DA04-4726-B3A2-E37C61829253}" dt="2026-04-08T16:20:24.919" v="210"/>
-          <ac:spMkLst>
-            <pc:docMk/>
-            <pc:sldMk cId="0" sldId="263"/>
-            <ac:spMk id="5" creationId="{7D0ED2D7-05F3-4B9C-0E38-3E16B7646BEA}"/>
-          </ac:spMkLst>
-        </pc:spChg>
-        <pc:spChg chg="del mod">
-          <ac:chgData name="Sonal Genani" userId="d1fd93578f9e8c8c" providerId="LiveId" clId="{0300D4C8-DA04-4726-B3A2-E37C61829253}" dt="2026-04-08T16:20:03.954" v="172" actId="21"/>
-          <ac:spMkLst>
-            <pc:docMk/>
-            <pc:sldMk cId="0" sldId="263"/>
-            <ac:spMk id="11" creationId="{00000000-0000-0000-0000-000000000000}"/>
-          </ac:spMkLst>
-        </pc:spChg>
         <pc:spChg chg="mod">
           <ac:chgData name="Sonal Genani" userId="d1fd93578f9e8c8c" providerId="LiveId" clId="{0300D4C8-DA04-4726-B3A2-E37C61829253}" dt="2026-04-08T16:21:16.237" v="214" actId="255"/>
           <ac:spMkLst>
@@ -266,14 +410,6 @@
             <ac:spMk id="12" creationId="{00000000-0000-0000-0000-000000000000}"/>
           </ac:spMkLst>
         </pc:spChg>
-        <pc:picChg chg="del">
-          <ac:chgData name="Sonal Genani" userId="d1fd93578f9e8c8c" providerId="LiveId" clId="{0300D4C8-DA04-4726-B3A2-E37C61829253}" dt="2026-04-08T16:18:49.157" v="167" actId="21"/>
-          <ac:picMkLst>
-            <pc:docMk/>
-            <pc:sldMk cId="0" sldId="263"/>
-            <ac:picMk id="2" creationId="{82F98FA1-671D-46D1-4749-53F1DD9C8B5F}"/>
-          </ac:picMkLst>
-        </pc:picChg>
       </pc:sldChg>
       <pc:sldChg chg="modSp mod">
         <pc:chgData name="Sonal Genani" userId="d1fd93578f9e8c8c" providerId="LiveId" clId="{0300D4C8-DA04-4726-B3A2-E37C61829253}" dt="2026-04-05T18:52:20.004" v="132" actId="14100"/>
@@ -304,6 +440,147 @@
             <ac:spMk id="14" creationId="{00000000-0000-0000-0000-000000000000}"/>
           </ac:spMkLst>
         </pc:spChg>
+      </pc:sldChg>
+      <pc:sldChg chg="addSp modSp mod">
+        <pc:chgData name="Sonal Genani" userId="d1fd93578f9e8c8c" providerId="LiveId" clId="{0300D4C8-DA04-4726-B3A2-E37C61829253}" dt="2026-04-13T13:50:13.925" v="327" actId="1076"/>
+        <pc:sldMkLst>
+          <pc:docMk/>
+          <pc:sldMk cId="121223606" sldId="268"/>
+        </pc:sldMkLst>
+        <pc:spChg chg="add mod">
+          <ac:chgData name="Sonal Genani" userId="d1fd93578f9e8c8c" providerId="LiveId" clId="{0300D4C8-DA04-4726-B3A2-E37C61829253}" dt="2026-04-13T13:50:13.925" v="327" actId="1076"/>
+          <ac:spMkLst>
+            <pc:docMk/>
+            <pc:sldMk cId="121223606" sldId="268"/>
+            <ac:spMk id="26" creationId="{C1260C34-0C6F-11DE-5D61-0E5D0A36120E}"/>
+          </ac:spMkLst>
+        </pc:spChg>
+        <pc:spChg chg="mod">
+          <ac:chgData name="Sonal Genani" userId="d1fd93578f9e8c8c" providerId="LiveId" clId="{0300D4C8-DA04-4726-B3A2-E37C61829253}" dt="2026-04-13T13:47:33.588" v="221" actId="1076"/>
+          <ac:spMkLst>
+            <pc:docMk/>
+            <pc:sldMk cId="121223606" sldId="268"/>
+            <ac:spMk id="44" creationId="{3578161E-D839-4793-89CB-83A287A2849E}"/>
+          </ac:spMkLst>
+        </pc:spChg>
+        <pc:grpChg chg="mod">
+          <ac:chgData name="Sonal Genani" userId="d1fd93578f9e8c8c" providerId="LiveId" clId="{0300D4C8-DA04-4726-B3A2-E37C61829253}" dt="2026-04-13T13:47:50.520" v="223" actId="1076"/>
+          <ac:grpSpMkLst>
+            <pc:docMk/>
+            <pc:sldMk cId="121223606" sldId="268"/>
+            <ac:grpSpMk id="47" creationId="{1E9CDC51-FF0E-F171-6762-BB19A05B4D8E}"/>
+          </ac:grpSpMkLst>
+        </pc:grpChg>
+        <pc:picChg chg="mod">
+          <ac:chgData name="Sonal Genani" userId="d1fd93578f9e8c8c" providerId="LiveId" clId="{0300D4C8-DA04-4726-B3A2-E37C61829253}" dt="2026-04-13T13:47:29.386" v="220" actId="1076"/>
+          <ac:picMkLst>
+            <pc:docMk/>
+            <pc:sldMk cId="121223606" sldId="268"/>
+            <ac:picMk id="46" creationId="{21A2EF52-784B-5BFA-EB88-FB9E7588BFF8}"/>
+          </ac:picMkLst>
+        </pc:picChg>
+        <pc:picChg chg="mod">
+          <ac:chgData name="Sonal Genani" userId="d1fd93578f9e8c8c" providerId="LiveId" clId="{0300D4C8-DA04-4726-B3A2-E37C61829253}" dt="2026-04-13T13:43:35.195" v="215" actId="1076"/>
+          <ac:picMkLst>
+            <pc:docMk/>
+            <pc:sldMk cId="121223606" sldId="268"/>
+            <ac:picMk id="50" creationId="{C926F708-70B7-B0DB-A148-0FA2830D925D}"/>
+          </ac:picMkLst>
+        </pc:picChg>
+      </pc:sldChg>
+      <pc:sldChg chg="addSp modSp new mod">
+        <pc:chgData name="Sonal Genani" userId="d1fd93578f9e8c8c" providerId="LiveId" clId="{0300D4C8-DA04-4726-B3A2-E37C61829253}" dt="2026-04-16T13:42:18.350" v="782" actId="1076"/>
+        <pc:sldMkLst>
+          <pc:docMk/>
+          <pc:sldMk cId="3330356273" sldId="269"/>
+        </pc:sldMkLst>
+        <pc:spChg chg="add mod">
+          <ac:chgData name="Sonal Genani" userId="d1fd93578f9e8c8c" providerId="LiveId" clId="{0300D4C8-DA04-4726-B3A2-E37C61829253}" dt="2026-04-16T13:04:47.787" v="556" actId="255"/>
+          <ac:spMkLst>
+            <pc:docMk/>
+            <pc:sldMk cId="3330356273" sldId="269"/>
+            <ac:spMk id="2" creationId="{DFE33A44-A675-63C4-FABF-A0C66D26F941}"/>
+          </ac:spMkLst>
+        </pc:spChg>
+        <pc:spChg chg="add mod">
+          <ac:chgData name="Sonal Genani" userId="d1fd93578f9e8c8c" providerId="LiveId" clId="{0300D4C8-DA04-4726-B3A2-E37C61829253}" dt="2026-04-16T13:26:39.430" v="752" actId="20577"/>
+          <ac:spMkLst>
+            <pc:docMk/>
+            <pc:sldMk cId="3330356273" sldId="269"/>
+            <ac:spMk id="4" creationId="{2AA44589-DDD9-DE7E-C3D7-6428E9AC9E25}"/>
+          </ac:spMkLst>
+        </pc:spChg>
+        <pc:spChg chg="add mod ord">
+          <ac:chgData name="Sonal Genani" userId="d1fd93578f9e8c8c" providerId="LiveId" clId="{0300D4C8-DA04-4726-B3A2-E37C61829253}" dt="2026-04-16T13:42:18.350" v="782" actId="1076"/>
+          <ac:spMkLst>
+            <pc:docMk/>
+            <pc:sldMk cId="3330356273" sldId="269"/>
+            <ac:spMk id="12" creationId="{00000000-0000-0000-0000-000000000000}"/>
+          </ac:spMkLst>
+        </pc:spChg>
+        <pc:spChg chg="add mod">
+          <ac:chgData name="Sonal Genani" userId="d1fd93578f9e8c8c" providerId="LiveId" clId="{0300D4C8-DA04-4726-B3A2-E37C61829253}" dt="2026-04-16T13:08:42.046" v="587" actId="1076"/>
+          <ac:spMkLst>
+            <pc:docMk/>
+            <pc:sldMk cId="3330356273" sldId="269"/>
+            <ac:spMk id="14" creationId="{00000000-0000-0000-0000-000000000000}"/>
+          </ac:spMkLst>
+        </pc:spChg>
+        <pc:picChg chg="add mod">
+          <ac:chgData name="Sonal Genani" userId="d1fd93578f9e8c8c" providerId="LiveId" clId="{0300D4C8-DA04-4726-B3A2-E37C61829253}" dt="2026-04-16T13:24:35.423" v="746" actId="14100"/>
+          <ac:picMkLst>
+            <pc:docMk/>
+            <pc:sldMk cId="3330356273" sldId="269"/>
+            <ac:picMk id="8" creationId="{1E55E186-77CA-90F3-CE2B-D9091070E225}"/>
+          </ac:picMkLst>
+        </pc:picChg>
+      </pc:sldChg>
+      <pc:sldChg chg="addSp modSp new mod">
+        <pc:chgData name="Sonal Genani" userId="d1fd93578f9e8c8c" providerId="LiveId" clId="{0300D4C8-DA04-4726-B3A2-E37C61829253}" dt="2026-04-16T13:28:26.788" v="762" actId="20577"/>
+        <pc:sldMkLst>
+          <pc:docMk/>
+          <pc:sldMk cId="1062620943" sldId="270"/>
+        </pc:sldMkLst>
+        <pc:spChg chg="add mod">
+          <ac:chgData name="Sonal Genani" userId="d1fd93578f9e8c8c" providerId="LiveId" clId="{0300D4C8-DA04-4726-B3A2-E37C61829253}" dt="2026-04-16T13:14:39.469" v="627" actId="1076"/>
+          <ac:spMkLst>
+            <pc:docMk/>
+            <pc:sldMk cId="1062620943" sldId="270"/>
+            <ac:spMk id="3" creationId="{8912A0C5-DF62-7604-C730-E673567306C8}"/>
+          </ac:spMkLst>
+        </pc:spChg>
+        <pc:spChg chg="add mod">
+          <ac:chgData name="Sonal Genani" userId="d1fd93578f9e8c8c" providerId="LiveId" clId="{0300D4C8-DA04-4726-B3A2-E37C61829253}" dt="2026-04-16T13:28:26.788" v="762" actId="20577"/>
+          <ac:spMkLst>
+            <pc:docMk/>
+            <pc:sldMk cId="1062620943" sldId="270"/>
+            <ac:spMk id="5" creationId="{5F82F99E-08C1-7EE5-BBB8-EFA6DD7899D4}"/>
+          </ac:spMkLst>
+        </pc:spChg>
+        <pc:spChg chg="add mod">
+          <ac:chgData name="Sonal Genani" userId="d1fd93578f9e8c8c" providerId="LiveId" clId="{0300D4C8-DA04-4726-B3A2-E37C61829253}" dt="2026-04-16T13:11:59.729" v="613" actId="1076"/>
+          <ac:spMkLst>
+            <pc:docMk/>
+            <pc:sldMk cId="1062620943" sldId="270"/>
+            <ac:spMk id="17" creationId="{00000000-0000-0000-0000-000000000000}"/>
+          </ac:spMkLst>
+        </pc:spChg>
+        <pc:spChg chg="add mod">
+          <ac:chgData name="Sonal Genani" userId="d1fd93578f9e8c8c" providerId="LiveId" clId="{0300D4C8-DA04-4726-B3A2-E37C61829253}" dt="2026-04-16T13:14:15.501" v="624" actId="14100"/>
+          <ac:spMkLst>
+            <pc:docMk/>
+            <pc:sldMk cId="1062620943" sldId="270"/>
+            <ac:spMk id="19" creationId="{00000000-0000-0000-0000-000000000000}"/>
+          </ac:spMkLst>
+        </pc:spChg>
+        <pc:picChg chg="add mod">
+          <ac:chgData name="Sonal Genani" userId="d1fd93578f9e8c8c" providerId="LiveId" clId="{0300D4C8-DA04-4726-B3A2-E37C61829253}" dt="2026-04-16T13:26:56.521" v="756" actId="14100"/>
+          <ac:picMkLst>
+            <pc:docMk/>
+            <pc:sldMk cId="1062620943" sldId="270"/>
+            <ac:picMk id="24" creationId="{DEDD8881-5B15-C9E0-47F3-23BBA4E89D4E}"/>
+          </ac:picMkLst>
+        </pc:picChg>
       </pc:sldChg>
     </pc:docChg>
   </pc:docChgLst>
@@ -584,7 +861,7 @@
           <a:p>
             <a:fld id="{F7021451-1387-4CA6-816F-3879F97B5CBC}" type="slidenum">
               <a:rPr lang="en-US"/>
-              <a:t>10</a:t>
+              <a:t>12</a:t>
             </a:fld>
             <a:endParaRPr lang="en-US"/>
           </a:p>
@@ -668,7 +945,7 @@
           <a:p>
             <a:fld id="{F7021451-1387-4CA6-816F-3879F97B5CBC}" type="slidenum">
               <a:rPr lang="en-US"/>
-              <a:t>11</a:t>
+              <a:t>13</a:t>
             </a:fld>
             <a:endParaRPr lang="en-US"/>
           </a:p>
@@ -1256,7 +1533,7 @@
           <a:p>
             <a:fld id="{F7021451-1387-4CA6-816F-3879F97B5CBC}" type="slidenum">
               <a:rPr lang="en-US"/>
-              <a:t>8</a:t>
+              <a:t>10</a:t>
             </a:fld>
             <a:endParaRPr lang="en-US"/>
           </a:p>
@@ -1340,7 +1617,7 @@
           <a:p>
             <a:fld id="{F7021451-1387-4CA6-816F-3879F97B5CBC}" type="slidenum">
               <a:rPr lang="en-US"/>
-              <a:t>9</a:t>
+              <a:t>11</a:t>
             </a:fld>
             <a:endParaRPr lang="en-US"/>
           </a:p>
@@ -3282,10 +3559,10 @@
         </p:nvGrpSpPr>
         <p:grpSpPr>
           <a:xfrm>
-            <a:off x="-19007" y="2928677"/>
-            <a:ext cx="4276134" cy="431080"/>
+            <a:off x="0" y="2611176"/>
+            <a:ext cx="4113486" cy="378056"/>
             <a:chOff x="0" y="2985846"/>
-            <a:chExt cx="4276134" cy="431080"/>
+            <a:chExt cx="4224335" cy="431080"/>
           </a:xfrm>
         </p:grpSpPr>
         <p:grpSp>
@@ -3428,7 +3705,7 @@
           </p:nvSpPr>
           <p:spPr>
             <a:xfrm>
-              <a:off x="466725" y="3100839"/>
+              <a:off x="414926" y="3095093"/>
               <a:ext cx="3809409" cy="223587"/>
             </a:xfrm>
             <a:prstGeom prst="rect">
@@ -3576,7 +3853,7 @@
         </p:blipFill>
         <p:spPr>
           <a:xfrm>
-            <a:off x="429808" y="3639905"/>
+            <a:off x="406310" y="3639905"/>
             <a:ext cx="395331" cy="381795"/>
           </a:xfrm>
           <a:prstGeom prst="rect">
@@ -4085,14 +4362,58 @@
         </p:blipFill>
         <p:spPr>
           <a:xfrm>
-            <a:off x="173754" y="1046557"/>
-            <a:ext cx="3854253" cy="1849530"/>
+            <a:off x="410092" y="1052621"/>
+            <a:ext cx="3255287" cy="1562106"/>
           </a:xfrm>
           <a:prstGeom prst="rect">
             <a:avLst/>
           </a:prstGeom>
         </p:spPr>
       </p:pic>
+      <p:sp>
+        <p:nvSpPr>
+          <p:cNvPr id="26" name="TextBox 25">
+            <a:extLst>
+              <a:ext uri="{FF2B5EF4-FFF2-40B4-BE49-F238E27FC236}">
+                <a16:creationId xmlns:a16="http://schemas.microsoft.com/office/drawing/2014/main" id="{C1260C34-0C6F-11DE-5D61-0E5D0A36120E}"/>
+              </a:ext>
+            </a:extLst>
+          </p:cNvPr>
+          <p:cNvSpPr txBox="1"/>
+          <p:nvPr/>
+        </p:nvSpPr>
+        <p:spPr>
+          <a:xfrm>
+            <a:off x="237841" y="3156718"/>
+            <a:ext cx="5711878" cy="338554"/>
+          </a:xfrm>
+          <a:prstGeom prst="rect">
+            <a:avLst/>
+          </a:prstGeom>
+          <a:noFill/>
+        </p:spPr>
+        <p:txBody>
+          <a:bodyPr wrap="square" rtlCol="0">
+            <a:spAutoFit/>
+          </a:bodyPr>
+          <a:lstStyle/>
+          <a:p>
+            <a:r>
+              <a:rPr lang="en-US" sz="1600" b="1" dirty="0">
+                <a:solidFill>
+                  <a:srgbClr val="1565C0"/>
+                </a:solidFill>
+              </a:rPr>
+              <a:t>Smarter Insights for Better Care using Health Metrics Dashboard</a:t>
+            </a:r>
+            <a:endParaRPr lang="en-IN" sz="1600" b="1" dirty="0">
+              <a:solidFill>
+                <a:srgbClr val="1565C0"/>
+              </a:solidFill>
+            </a:endParaRPr>
+          </a:p>
+        </p:txBody>
+      </p:sp>
     </p:spTree>
     <p:custDataLst>
       <p:tags r:id="rId1"/>
@@ -4111,6 +4432,592 @@
 
 <file path=ppt/slides/slide10.xml><?xml version="1.0" encoding="utf-8"?>
 <p:sld xmlns:a="http://schemas.openxmlformats.org/drawingml/2006/main" xmlns:r="http://schemas.openxmlformats.org/officeDocument/2006/relationships" xmlns:p="http://schemas.openxmlformats.org/presentationml/2006/main">
+  <p:cSld name="Slide 8">
+    <p:bg>
+      <p:bgPr>
+        <a:solidFill>
+          <a:srgbClr val="FFFFFF"/>
+        </a:solidFill>
+        <a:effectLst/>
+      </p:bgPr>
+    </p:bg>
+    <p:spTree>
+      <p:nvGrpSpPr>
+        <p:cNvPr id="1" name=""/>
+        <p:cNvGrpSpPr/>
+        <p:nvPr/>
+      </p:nvGrpSpPr>
+      <p:grpSpPr>
+        <a:xfrm>
+          <a:off x="0" y="0"/>
+          <a:ext cx="0" cy="0"/>
+          <a:chOff x="0" y="0"/>
+          <a:chExt cx="0" cy="0"/>
+        </a:xfrm>
+      </p:grpSpPr>
+      <p:sp>
+        <p:nvSpPr>
+          <p:cNvPr id="4" name="Text 2"/>
+          <p:cNvSpPr/>
+          <p:nvPr/>
+        </p:nvSpPr>
+        <p:spPr>
+          <a:xfrm>
+            <a:off x="320040" y="621792"/>
+            <a:ext cx="8229600" cy="438912"/>
+          </a:xfrm>
+          <a:prstGeom prst="rect">
+            <a:avLst/>
+          </a:prstGeom>
+          <a:noFill/>
+          <a:ln/>
+        </p:spPr>
+        <p:txBody>
+          <a:bodyPr wrap="square" rtlCol="0" anchor="ctr"/>
+          <a:lstStyle/>
+          <a:p>
+            <a:pPr marL="0" indent="0">
+              <a:buNone/>
+            </a:pPr>
+            <a:r>
+              <a:rPr lang="en-US" sz="2200" b="1" dirty="0">
+                <a:solidFill>
+                  <a:srgbClr val="1B3A8A"/>
+                </a:solidFill>
+                <a:latin typeface="Calibri" pitchFamily="34" charset="0"/>
+                <a:ea typeface="Calibri" pitchFamily="34" charset="-122"/>
+                <a:cs typeface="Calibri" pitchFamily="34" charset="-120"/>
+              </a:rPr>
+              <a:t>Video of Project Demo</a:t>
+            </a:r>
+            <a:endParaRPr lang="en-US" sz="2200" dirty="0"/>
+          </a:p>
+        </p:txBody>
+      </p:sp>
+      <p:sp>
+        <p:nvSpPr>
+          <p:cNvPr id="6" name="Shape 4"/>
+          <p:cNvSpPr/>
+          <p:nvPr/>
+        </p:nvSpPr>
+        <p:spPr>
+          <a:xfrm>
+            <a:off x="365760" y="685800"/>
+            <a:ext cx="8412480" cy="3977640"/>
+          </a:xfrm>
+          <a:prstGeom prst="rect">
+            <a:avLst/>
+          </a:prstGeom>
+          <a:solidFill>
+            <a:srgbClr val="ECEFF1"/>
+          </a:solidFill>
+          <a:ln w="25400">
+            <a:solidFill>
+              <a:srgbClr val="1B3A8A"/>
+            </a:solidFill>
+            <a:prstDash val="solid"/>
+          </a:ln>
+        </p:spPr>
+        <p:txBody>
+          <a:bodyPr/>
+          <a:lstStyle/>
+          <a:p>
+            <a:endParaRPr lang="en-IN"/>
+          </a:p>
+        </p:txBody>
+      </p:sp>
+      <p:sp>
+        <p:nvSpPr>
+          <p:cNvPr id="7" name="Shape 5"/>
+          <p:cNvSpPr/>
+          <p:nvPr/>
+        </p:nvSpPr>
+        <p:spPr>
+          <a:xfrm>
+            <a:off x="365760" y="685800"/>
+            <a:ext cx="8412480" cy="384048"/>
+          </a:xfrm>
+          <a:prstGeom prst="rect">
+            <a:avLst/>
+          </a:prstGeom>
+          <a:solidFill>
+            <a:srgbClr val="E0E0E0"/>
+          </a:solidFill>
+          <a:ln/>
+        </p:spPr>
+        <p:txBody>
+          <a:bodyPr/>
+          <a:lstStyle/>
+          <a:p>
+            <a:endParaRPr lang="en-IN"/>
+          </a:p>
+        </p:txBody>
+      </p:sp>
+      <p:sp>
+        <p:nvSpPr>
+          <p:cNvPr id="8" name="Shape 6"/>
+          <p:cNvSpPr/>
+          <p:nvPr/>
+        </p:nvSpPr>
+        <p:spPr>
+          <a:xfrm>
+            <a:off x="502920" y="777240"/>
+            <a:ext cx="164592" cy="164592"/>
+          </a:xfrm>
+          <a:prstGeom prst="ellipse">
+            <a:avLst/>
+          </a:prstGeom>
+          <a:solidFill>
+            <a:srgbClr val="FF5F57"/>
+          </a:solidFill>
+          <a:ln/>
+        </p:spPr>
+        <p:txBody>
+          <a:bodyPr/>
+          <a:lstStyle/>
+          <a:p>
+            <a:endParaRPr lang="en-IN"/>
+          </a:p>
+        </p:txBody>
+      </p:sp>
+      <p:sp>
+        <p:nvSpPr>
+          <p:cNvPr id="9" name="Shape 7"/>
+          <p:cNvSpPr/>
+          <p:nvPr/>
+        </p:nvSpPr>
+        <p:spPr>
+          <a:xfrm>
+            <a:off x="731520" y="777240"/>
+            <a:ext cx="164592" cy="164592"/>
+          </a:xfrm>
+          <a:prstGeom prst="ellipse">
+            <a:avLst/>
+          </a:prstGeom>
+          <a:solidFill>
+            <a:srgbClr val="FEBC2E"/>
+          </a:solidFill>
+          <a:ln/>
+        </p:spPr>
+        <p:txBody>
+          <a:bodyPr/>
+          <a:lstStyle/>
+          <a:p>
+            <a:endParaRPr lang="en-IN"/>
+          </a:p>
+        </p:txBody>
+      </p:sp>
+      <p:sp>
+        <p:nvSpPr>
+          <p:cNvPr id="10" name="Shape 8"/>
+          <p:cNvSpPr/>
+          <p:nvPr/>
+        </p:nvSpPr>
+        <p:spPr>
+          <a:xfrm>
+            <a:off x="960120" y="777240"/>
+            <a:ext cx="164592" cy="164592"/>
+          </a:xfrm>
+          <a:prstGeom prst="ellipse">
+            <a:avLst/>
+          </a:prstGeom>
+          <a:solidFill>
+            <a:srgbClr val="28C840"/>
+          </a:solidFill>
+          <a:ln/>
+        </p:spPr>
+        <p:txBody>
+          <a:bodyPr/>
+          <a:lstStyle/>
+          <a:p>
+            <a:endParaRPr lang="en-IN"/>
+          </a:p>
+        </p:txBody>
+      </p:sp>
+      <p:sp>
+        <p:nvSpPr>
+          <p:cNvPr id="12" name="Text 10"/>
+          <p:cNvSpPr/>
+          <p:nvPr/>
+        </p:nvSpPr>
+        <p:spPr>
+          <a:xfrm>
+            <a:off x="1389888" y="768096"/>
+            <a:ext cx="7205472" cy="292608"/>
+          </a:xfrm>
+          <a:prstGeom prst="rect">
+            <a:avLst/>
+          </a:prstGeom>
+          <a:noFill/>
+          <a:ln/>
+        </p:spPr>
+        <p:txBody>
+          <a:bodyPr wrap="square" rtlCol="0" anchor="ctr"/>
+          <a:lstStyle/>
+          <a:p>
+            <a:r>
+              <a:rPr lang="en-IN" sz="1200" u="sng" dirty="0">
+                <a:hlinkClick r:id="rId4"/>
+              </a:rPr>
+              <a:t>https://1drv.ms/v/c/D1FD93578F9E8C8C/IQBnqRj4Yu6hTp_tWBOeDdYSAaGVZuHmiJ-zouaw8Fbe6vs?e=SOLEml</a:t>
+            </a:r>
+            <a:endParaRPr lang="en-US" sz="1200" dirty="0"/>
+          </a:p>
+        </p:txBody>
+      </p:sp>
+      <p:sp>
+        <p:nvSpPr>
+          <p:cNvPr id="13" name="Shape 11"/>
+          <p:cNvSpPr/>
+          <p:nvPr/>
+        </p:nvSpPr>
+        <p:spPr>
+          <a:xfrm>
+            <a:off x="3749040" y="1828800"/>
+            <a:ext cx="1645920" cy="1645920"/>
+          </a:xfrm>
+          <a:prstGeom prst="ellipse">
+            <a:avLst/>
+          </a:prstGeom>
+          <a:solidFill>
+            <a:srgbClr val="1B3A8A">
+              <a:alpha val="80000"/>
+            </a:srgbClr>
+          </a:solidFill>
+          <a:ln/>
+        </p:spPr>
+        <p:txBody>
+          <a:bodyPr/>
+          <a:lstStyle/>
+          <a:p>
+            <a:endParaRPr lang="en-IN"/>
+          </a:p>
+        </p:txBody>
+      </p:sp>
+      <p:sp>
+        <p:nvSpPr>
+          <p:cNvPr id="14" name="Text 12"/>
+          <p:cNvSpPr/>
+          <p:nvPr/>
+        </p:nvSpPr>
+        <p:spPr>
+          <a:xfrm>
+            <a:off x="3749040" y="1828800"/>
+            <a:ext cx="1645920" cy="1645920"/>
+          </a:xfrm>
+          <a:prstGeom prst="rect">
+            <a:avLst/>
+          </a:prstGeom>
+          <a:noFill/>
+          <a:ln/>
+        </p:spPr>
+        <p:txBody>
+          <a:bodyPr wrap="square" rtlCol="0" anchor="ctr"/>
+          <a:lstStyle/>
+          <a:p>
+            <a:pPr marL="0" indent="0" algn="ctr">
+              <a:buNone/>
+            </a:pPr>
+            <a:r>
+              <a:rPr lang="en-US" sz="4800" dirty="0">
+                <a:solidFill>
+                  <a:srgbClr val="FFFFFF"/>
+                </a:solidFill>
+              </a:rPr>
+              <a:t>▶</a:t>
+            </a:r>
+            <a:endParaRPr lang="en-US" sz="4800" dirty="0"/>
+          </a:p>
+        </p:txBody>
+      </p:sp>
+      <p:sp>
+        <p:nvSpPr>
+          <p:cNvPr id="15" name="Text 13"/>
+          <p:cNvSpPr/>
+          <p:nvPr/>
+        </p:nvSpPr>
+        <p:spPr>
+          <a:xfrm>
+            <a:off x="914400" y="3794760"/>
+            <a:ext cx="7315200" cy="594360"/>
+          </a:xfrm>
+          <a:prstGeom prst="rect">
+            <a:avLst/>
+          </a:prstGeom>
+          <a:noFill/>
+          <a:ln/>
+        </p:spPr>
+        <p:txBody>
+          <a:bodyPr wrap="square" rtlCol="0" anchor="ctr"/>
+          <a:lstStyle/>
+          <a:p>
+            <a:pPr marL="0" indent="0" algn="ctr">
+              <a:buNone/>
+            </a:pPr>
+            <a:r>
+              <a:rPr lang="en-US" sz="1100" i="1" dirty="0">
+                <a:solidFill>
+                  <a:srgbClr val="607D8B"/>
+                </a:solidFill>
+                <a:latin typeface="Calibri" pitchFamily="34" charset="0"/>
+                <a:ea typeface="Calibri" pitchFamily="34" charset="-122"/>
+                <a:cs typeface="Calibri" pitchFamily="34" charset="-120"/>
+              </a:rPr>
+              <a:t>[Insert your project demo video.</a:t>
+            </a:r>
+            <a:endParaRPr lang="en-US" sz="1100" dirty="0"/>
+          </a:p>
+          <a:p>
+            <a:pPr marL="0" indent="0" algn="ctr">
+              <a:buNone/>
+            </a:pPr>
+            <a:r>
+              <a:rPr lang="en-US" sz="1100" i="1" dirty="0">
+                <a:solidFill>
+                  <a:srgbClr val="607D8B"/>
+                </a:solidFill>
+                <a:latin typeface="Calibri" pitchFamily="34" charset="0"/>
+                <a:ea typeface="Calibri" pitchFamily="34" charset="-122"/>
+                <a:cs typeface="Calibri" pitchFamily="34" charset="-120"/>
+              </a:rPr>
+              <a:t>You can embed a video your live project.]</a:t>
+            </a:r>
+            <a:endParaRPr lang="en-US" sz="1100" dirty="0"/>
+          </a:p>
+        </p:txBody>
+      </p:sp>
+    </p:spTree>
+    <p:custDataLst>
+      <p:tags r:id="rId1"/>
+    </p:custDataLst>
+  </p:cSld>
+  <p:clrMapOvr>
+    <a:masterClrMapping/>
+  </p:clrMapOvr>
+</p:sld>
+</file>
+
+<file path=ppt/slides/slide11.xml><?xml version="1.0" encoding="utf-8"?>
+<p:sld xmlns:a="http://schemas.openxmlformats.org/drawingml/2006/main" xmlns:r="http://schemas.openxmlformats.org/officeDocument/2006/relationships" xmlns:p="http://schemas.openxmlformats.org/presentationml/2006/main">
+  <p:cSld name="Slide 9">
+    <p:bg>
+      <p:bgPr>
+        <a:solidFill>
+          <a:srgbClr val="FFFFFF"/>
+        </a:solidFill>
+        <a:effectLst/>
+      </p:bgPr>
+    </p:bg>
+    <p:spTree>
+      <p:nvGrpSpPr>
+        <p:cNvPr id="1" name=""/>
+        <p:cNvGrpSpPr/>
+        <p:nvPr/>
+      </p:nvGrpSpPr>
+      <p:grpSpPr>
+        <a:xfrm>
+          <a:off x="0" y="0"/>
+          <a:ext cx="0" cy="0"/>
+          <a:chOff x="0" y="0"/>
+          <a:chExt cx="0" cy="0"/>
+        </a:xfrm>
+      </p:grpSpPr>
+      <p:sp>
+        <p:nvSpPr>
+          <p:cNvPr id="4" name="Text 2"/>
+          <p:cNvSpPr/>
+          <p:nvPr/>
+        </p:nvSpPr>
+        <p:spPr>
+          <a:xfrm>
+            <a:off x="130351" y="612064"/>
+            <a:ext cx="8229600" cy="438912"/>
+          </a:xfrm>
+          <a:prstGeom prst="rect">
+            <a:avLst/>
+          </a:prstGeom>
+          <a:noFill/>
+          <a:ln/>
+        </p:spPr>
+        <p:txBody>
+          <a:bodyPr wrap="square" rtlCol="0" anchor="ctr"/>
+          <a:lstStyle/>
+          <a:p>
+            <a:pPr marL="0" indent="0">
+              <a:buNone/>
+            </a:pPr>
+            <a:r>
+              <a:rPr lang="en-US" sz="2000" b="1" dirty="0">
+                <a:solidFill>
+                  <a:srgbClr val="1B3A8A"/>
+                </a:solidFill>
+                <a:latin typeface="Lato" panose="020F0502020204030203" pitchFamily="34" charset="0"/>
+                <a:ea typeface="Calibri" pitchFamily="34" charset="-122"/>
+                <a:cs typeface="Arial" panose="020B0604020202020204" pitchFamily="34" charset="0"/>
+              </a:rPr>
+              <a:t>Conclusion</a:t>
+            </a:r>
+            <a:endParaRPr lang="en-US" sz="2000" dirty="0">
+              <a:latin typeface="Lato" panose="020F0502020204030203" pitchFamily="34" charset="0"/>
+              <a:cs typeface="Arial" panose="020B0604020202020204" pitchFamily="34" charset="0"/>
+            </a:endParaRPr>
+          </a:p>
+        </p:txBody>
+      </p:sp>
+      <p:sp>
+        <p:nvSpPr>
+          <p:cNvPr id="14" name="Text 12"/>
+          <p:cNvSpPr/>
+          <p:nvPr/>
+        </p:nvSpPr>
+        <p:spPr>
+          <a:xfrm>
+            <a:off x="125486" y="1084927"/>
+            <a:ext cx="5178034" cy="3474720"/>
+          </a:xfrm>
+          <a:prstGeom prst="rect">
+            <a:avLst/>
+          </a:prstGeom>
+          <a:noFill/>
+          <a:ln/>
+        </p:spPr>
+        <p:txBody>
+          <a:bodyPr wrap="square" rtlCol="0" anchor="t"/>
+          <a:lstStyle/>
+          <a:p>
+            <a:r>
+              <a:rPr lang="en-IN" sz="1400" dirty="0">
+                <a:latin typeface="Arial" panose="020B0604020202020204" pitchFamily="34" charset="0"/>
+                <a:cs typeface="Arial" panose="020B0604020202020204" pitchFamily="34" charset="0"/>
+              </a:rPr>
+              <a:t>This project addressed the challenge of transforming raw and inconsistent healthcare data into meaningful insights for better decision-making. Using Excel, Power BI, and Microsoft Copilot, the data was cleaned, analysed, and visualized through an interactive dashboard. Key findings included patterns of patient admissions, prevalence of chronic diseases, and identification of high-risk groups. All project objectives were successfully achieved, including data preprocessing, KPI analysis, visualization, and AI integration. The project adds value by demonstrating a practical, data-driven approach to improving healthcare management. This fellowship experience enhanced my skills in data analytics, visualization, and AI-assisted reporting, making it highly relevant and impactful.</a:t>
+            </a:r>
+          </a:p>
+          <a:p>
+            <a:br>
+              <a:rPr lang="en-IN" sz="1400" dirty="0">
+                <a:latin typeface="Arial" panose="020B0604020202020204" pitchFamily="34" charset="0"/>
+                <a:cs typeface="Arial" panose="020B0604020202020204" pitchFamily="34" charset="0"/>
+              </a:rPr>
+            </a:br>
+            <a:endParaRPr lang="en-IN" sz="1400" dirty="0">
+              <a:latin typeface="Arial" panose="020B0604020202020204" pitchFamily="34" charset="0"/>
+              <a:cs typeface="Arial" panose="020B0604020202020204" pitchFamily="34" charset="0"/>
+            </a:endParaRPr>
+          </a:p>
+          <a:p>
+            <a:r>
+              <a:rPr lang="en-IN" sz="1400" dirty="0">
+                <a:latin typeface="Arial" panose="020B0604020202020204" pitchFamily="34" charset="0"/>
+                <a:cs typeface="Arial" panose="020B0604020202020204" pitchFamily="34" charset="0"/>
+              </a:rPr>
+              <a:t> </a:t>
+            </a:r>
+          </a:p>
+          <a:p>
+            <a:pPr marL="0" indent="0">
+              <a:buNone/>
+            </a:pPr>
+            <a:endParaRPr lang="en-US" dirty="0">
+              <a:latin typeface="Lato" panose="020F0502020204030203" pitchFamily="34" charset="0"/>
+              <a:cs typeface="Arial" panose="020B0604020202020204" pitchFamily="34" charset="0"/>
+            </a:endParaRPr>
+          </a:p>
+        </p:txBody>
+      </p:sp>
+      <p:sp>
+        <p:nvSpPr>
+          <p:cNvPr id="19" name="Text 17"/>
+          <p:cNvSpPr/>
+          <p:nvPr/>
+        </p:nvSpPr>
+        <p:spPr>
+          <a:xfrm>
+            <a:off x="5303520" y="3474720"/>
+            <a:ext cx="3017520" cy="502920"/>
+          </a:xfrm>
+          <a:prstGeom prst="rect">
+            <a:avLst/>
+          </a:prstGeom>
+          <a:noFill/>
+          <a:ln/>
+        </p:spPr>
+        <p:txBody>
+          <a:bodyPr wrap="square" rtlCol="0" anchor="ctr"/>
+          <a:lstStyle/>
+          <a:p>
+            <a:pPr marL="0" indent="0" algn="ctr">
+              <a:buNone/>
+            </a:pPr>
+            <a:r>
+              <a:rPr lang="en-US" sz="1600" b="1" kern="0" spc="200" dirty="0">
+                <a:solidFill>
+                  <a:srgbClr val="FFFFFF"/>
+                </a:solidFill>
+                <a:latin typeface="Lato" panose="020F0502020204030203" pitchFamily="34" charset="0"/>
+                <a:ea typeface="Calibri" pitchFamily="34" charset="-122"/>
+                <a:cs typeface="Calibri" pitchFamily="34" charset="-120"/>
+              </a:rPr>
+              <a:t>CONCLUSION</a:t>
+            </a:r>
+            <a:endParaRPr lang="en-US" sz="1600" dirty="0">
+              <a:latin typeface="Lato" panose="020F0502020204030203" pitchFamily="34" charset="0"/>
+            </a:endParaRPr>
+          </a:p>
+        </p:txBody>
+      </p:sp>
+      <p:pic>
+        <p:nvPicPr>
+          <p:cNvPr id="20" name="Picture 19" descr="A blue circle with a pencil and paper with a star on it&#10;&#10;AI-generated content may be incorrect.">
+            <a:extLst>
+              <a:ext uri="{FF2B5EF4-FFF2-40B4-BE49-F238E27FC236}">
+                <a16:creationId xmlns:a16="http://schemas.microsoft.com/office/drawing/2014/main" id="{BAE68F53-65EE-1751-E92D-7025D978B68E}"/>
+              </a:ext>
+            </a:extLst>
+          </p:cNvPr>
+          <p:cNvPicPr>
+            <a:picLocks noChangeAspect="1"/>
+          </p:cNvPicPr>
+          <p:nvPr/>
+        </p:nvPicPr>
+        <p:blipFill>
+          <a:blip r:embed="rId4">
+            <a:duotone>
+              <a:schemeClr val="accent1">
+                <a:shade val="45000"/>
+                <a:satMod val="135000"/>
+              </a:schemeClr>
+              <a:prstClr val="white"/>
+            </a:duotone>
+          </a:blip>
+          <a:srcRect l="25397" t="26296" r="26825" b="29752"/>
+          <a:stretch>
+            <a:fillRect/>
+          </a:stretch>
+        </p:blipFill>
+        <p:spPr>
+          <a:xfrm>
+            <a:off x="4898406" y="971550"/>
+            <a:ext cx="3597456" cy="3309355"/>
+          </a:xfrm>
+          <a:prstGeom prst="rect">
+            <a:avLst/>
+          </a:prstGeom>
+        </p:spPr>
+      </p:pic>
+    </p:spTree>
+    <p:custDataLst>
+      <p:tags r:id="rId1"/>
+    </p:custDataLst>
+  </p:cSld>
+  <p:clrMapOvr>
+    <a:masterClrMapping/>
+  </p:clrMapOvr>
+</p:sld>
+</file>
+
+<file path=ppt/slides/slide12.xml><?xml version="1.0" encoding="utf-8"?>
+<p:sld xmlns:a="http://schemas.openxmlformats.org/drawingml/2006/main" xmlns:r="http://schemas.openxmlformats.org/officeDocument/2006/relationships" xmlns:p="http://schemas.openxmlformats.org/presentationml/2006/main">
   <p:cSld name="Slide 10">
     <p:spTree>
       <p:nvGrpSpPr>
@@ -4189,12 +5096,51 @@
           <a:bodyPr wrap="square" rtlCol="0" anchor="t"/>
           <a:lstStyle/>
           <a:p>
+            <a:pPr marL="171450" indent="-171450">
+              <a:lnSpc>
+                <a:spcPct val="150000"/>
+              </a:lnSpc>
+              <a:buFont typeface="Arial" panose="020B0604020202020204" pitchFamily="34" charset="0"/>
+              <a:buChar char="•"/>
+            </a:pPr>
             <a:r>
-              <a:rPr lang="en-US" sz="1400" dirty="0">
+              <a:rPr lang="en-US" sz="1200" dirty="0">
                 <a:latin typeface="Arial" panose="020B0604020202020204" pitchFamily="34" charset="0"/>
                 <a:cs typeface="Arial" panose="020B0604020202020204" pitchFamily="34" charset="0"/>
               </a:rPr>
-              <a:t>Future enhancements include integrating real-time data pipelines using APIs or Power Automate to enable live updates. The project can be extended by applying machine learning models for prediction and anomaly detection. Developing a web or Power Apps interface will improve accessibility. Expanding the dataset and incorporating advanced dashboard features, along with deeper AI integration, can further enhance scalability, usability, and decision-making impact.</a:t>
+              <a:t>Future enhancements include integrating real-time data pipelines using APIs or Power Automate to enable live updates.</a:t>
+            </a:r>
+          </a:p>
+          <a:p>
+            <a:pPr marL="171450" indent="-171450">
+              <a:lnSpc>
+                <a:spcPct val="150000"/>
+              </a:lnSpc>
+              <a:buFont typeface="Arial" panose="020B0604020202020204" pitchFamily="34" charset="0"/>
+              <a:buChar char="•"/>
+            </a:pPr>
+            <a:r>
+              <a:rPr lang="en-US" sz="1200" dirty="0">
+                <a:latin typeface="Arial" panose="020B0604020202020204" pitchFamily="34" charset="0"/>
+                <a:cs typeface="Arial" panose="020B0604020202020204" pitchFamily="34" charset="0"/>
+              </a:rPr>
+              <a:t>The project can be extended by applying machine learning models for prediction and anomaly detection.</a:t>
+            </a:r>
+          </a:p>
+          <a:p>
+            <a:pPr marL="171450" indent="-171450">
+              <a:lnSpc>
+                <a:spcPct val="150000"/>
+              </a:lnSpc>
+              <a:buFont typeface="Arial" panose="020B0604020202020204" pitchFamily="34" charset="0"/>
+              <a:buChar char="•"/>
+            </a:pPr>
+            <a:r>
+              <a:rPr lang="en-US" sz="1200" dirty="0">
+                <a:latin typeface="Arial" panose="020B0604020202020204" pitchFamily="34" charset="0"/>
+                <a:cs typeface="Arial" panose="020B0604020202020204" pitchFamily="34" charset="0"/>
+              </a:rPr>
+              <a:t>Developing a web or Power Apps interface will improve accessibility. Expanding the dataset and incorporating advanced dashboard features, along with deeper AI integration, can further enhance scalability, usability, and decision-making impact.</a:t>
             </a:r>
           </a:p>
         </p:txBody>
@@ -4246,7 +5192,7 @@
 </p:sld>
 </file>
 
-<file path=ppt/slides/slide11.xml><?xml version="1.0" encoding="utf-8"?>
+<file path=ppt/slides/slide13.xml><?xml version="1.0" encoding="utf-8"?>
 <p:sld xmlns:a="http://schemas.openxmlformats.org/drawingml/2006/main" xmlns:r="http://schemas.openxmlformats.org/officeDocument/2006/relationships" xmlns:p="http://schemas.openxmlformats.org/presentationml/2006/main">
   <p:cSld name="Slide 11">
     <p:bg>
@@ -4823,7 +5769,7 @@
         <p:spPr>
           <a:xfrm>
             <a:off x="125240" y="1082801"/>
-            <a:ext cx="5002346" cy="3631763"/>
+            <a:ext cx="5002346" cy="2841804"/>
           </a:xfrm>
           <a:prstGeom prst="rect">
             <a:avLst/>
@@ -4847,8 +5793,12 @@
               </a:tabLst>
             </a:pPr>
             <a:r>
-              <a:rPr lang="en-US" sz="1400" dirty="0"/>
-              <a:t>This project focuses on analyzing healthcare patient data to transform raw, inconsistent records into meaningful insights for better decision-making.</a:t>
+              <a:rPr lang="en-US" sz="1200" dirty="0">
+                <a:latin typeface="Lato" panose="020F0502020204030203" pitchFamily="34" charset="0"/>
+                <a:ea typeface="+mn-lt"/>
+                <a:cs typeface="Arial" panose="020B0604020202020204" pitchFamily="34" charset="0"/>
+              </a:rPr>
+              <a:t>Analyze healthcare patients' data to generate meaningful insights.</a:t>
             </a:r>
           </a:p>
           <a:p>
@@ -4863,8 +5813,12 @@
               </a:tabLst>
             </a:pPr>
             <a:r>
-              <a:rPr lang="en-US" sz="1400" dirty="0"/>
-              <a:t> The main objective is to clean, process, and visualize patient data to understand trends in admissions, medical conditions, and hospital performance.</a:t>
+              <a:rPr lang="en-US" sz="1200" dirty="0">
+                <a:latin typeface="Lato" panose="020F0502020204030203" pitchFamily="34" charset="0"/>
+                <a:ea typeface="+mn-lt"/>
+                <a:cs typeface="Arial" panose="020B0604020202020204" pitchFamily="34" charset="0"/>
+              </a:rPr>
+              <a:t>Cleans, processes, and visualizes raw and inconsistent records</a:t>
             </a:r>
           </a:p>
           <a:p>
@@ -4879,8 +5833,12 @@
               </a:tabLst>
             </a:pPr>
             <a:r>
-              <a:rPr lang="en-US" sz="1400" dirty="0"/>
-              <a:t>Tools such as Microsoft Excel, Power BI, and Microsoft Copilot are used for data cleaning, analysis, visualization, and AI-assisted insight generation.</a:t>
+              <a:rPr lang="en-US" sz="1200" dirty="0">
+                <a:latin typeface="Lato" panose="020F0502020204030203" pitchFamily="34" charset="0"/>
+                <a:ea typeface="+mn-lt"/>
+                <a:cs typeface="Arial" panose="020B0604020202020204" pitchFamily="34" charset="0"/>
+              </a:rPr>
+              <a:t>Identifies trends in admissions, medical conditions, and hospital performance</a:t>
             </a:r>
           </a:p>
           <a:p>
@@ -4895,14 +5853,93 @@
               </a:tabLst>
             </a:pPr>
             <a:r>
-              <a:rPr lang="en-US" sz="1400" dirty="0"/>
-              <a:t> The expected outcome is an interactive dashboard that highlights key metrics like patient distribution, disease burden, length of stay, and cost of care. A key highlight of the project is the integration of AI to generate insights, improve reporting efficiency, and support proactive, data-driven healthcare management.</a:t>
+              <a:rPr lang="en-US" sz="1200" dirty="0">
+                <a:latin typeface="Lato" panose="020F0502020204030203" pitchFamily="34" charset="0"/>
+                <a:ea typeface="+mn-lt"/>
+                <a:cs typeface="Arial" panose="020B0604020202020204" pitchFamily="34" charset="0"/>
+              </a:rPr>
+              <a:t>Uses Microsoft Excel, Power BI, and Microsoft Copilot</a:t>
             </a:r>
-            <a:endParaRPr lang="en-US" sz="1400" dirty="0">
-              <a:latin typeface="Lato" panose="020F0502020204030203" pitchFamily="34" charset="0"/>
-              <a:ea typeface="+mn-lt"/>
-              <a:cs typeface="Arial" panose="020B0604020202020204" pitchFamily="34" charset="0"/>
-            </a:endParaRPr>
+          </a:p>
+          <a:p>
+            <a:pPr marL="228600" indent="-228600">
+              <a:spcAft>
+                <a:spcPts val="800"/>
+              </a:spcAft>
+              <a:buFont typeface="Arial" panose="020B0604020202020204" pitchFamily="34" charset="0"/>
+              <a:buChar char="•"/>
+              <a:tabLst>
+                <a:tab pos="4229100" algn="ctr"/>
+              </a:tabLst>
+            </a:pPr>
+            <a:r>
+              <a:rPr lang="en-US" sz="1200" dirty="0">
+                <a:latin typeface="Lato" panose="020F0502020204030203" pitchFamily="34" charset="0"/>
+                <a:ea typeface="+mn-lt"/>
+                <a:cs typeface="Arial" panose="020B0604020202020204" pitchFamily="34" charset="0"/>
+              </a:rPr>
+              <a:t>Developing an interactive dashboard for key metrics</a:t>
+            </a:r>
+          </a:p>
+          <a:p>
+            <a:pPr marL="228600" indent="-228600">
+              <a:spcAft>
+                <a:spcPts val="800"/>
+              </a:spcAft>
+              <a:buFont typeface="Arial" panose="020B0604020202020204" pitchFamily="34" charset="0"/>
+              <a:buChar char="•"/>
+              <a:tabLst>
+                <a:tab pos="4229100" algn="ctr"/>
+              </a:tabLst>
+            </a:pPr>
+            <a:r>
+              <a:rPr lang="en-US" sz="1200" dirty="0">
+                <a:latin typeface="Lato" panose="020F0502020204030203" pitchFamily="34" charset="0"/>
+                <a:ea typeface="+mn-lt"/>
+                <a:cs typeface="Arial" panose="020B0604020202020204" pitchFamily="34" charset="0"/>
+              </a:rPr>
+              <a:t>Highlights patient distribution, disease burden, length of stay, and cost of care</a:t>
+            </a:r>
+          </a:p>
+          <a:p>
+            <a:pPr marL="228600" indent="-228600">
+              <a:spcAft>
+                <a:spcPts val="800"/>
+              </a:spcAft>
+              <a:buFont typeface="Arial" panose="020B0604020202020204" pitchFamily="34" charset="0"/>
+              <a:buChar char="•"/>
+              <a:tabLst>
+                <a:tab pos="4229100" algn="ctr"/>
+              </a:tabLst>
+            </a:pPr>
+            <a:r>
+              <a:rPr lang="en-US" sz="1200" dirty="0">
+                <a:latin typeface="Lato" panose="020F0502020204030203" pitchFamily="34" charset="0"/>
+                <a:ea typeface="+mn-lt"/>
+                <a:cs typeface="Arial" panose="020B0604020202020204" pitchFamily="34" charset="0"/>
+              </a:rPr>
+              <a:t>Integrates AI for insight generation and improved reporting efficiency</a:t>
+            </a:r>
+          </a:p>
+          <a:p>
+            <a:pPr marL="228600" indent="-228600">
+              <a:spcAft>
+                <a:spcPts val="800"/>
+              </a:spcAft>
+              <a:buFont typeface="Arial" panose="020B0604020202020204" pitchFamily="34" charset="0"/>
+              <a:buChar char="•"/>
+              <a:tabLst>
+                <a:tab pos="4229100" algn="ctr"/>
+              </a:tabLst>
+            </a:pPr>
+            <a:r>
+              <a:rPr lang="en-US" sz="1200" dirty="0">
+                <a:latin typeface="Lato" panose="020F0502020204030203" pitchFamily="34" charset="0"/>
+                <a:ea typeface="+mn-lt"/>
+                <a:cs typeface="Arial" panose="020B0604020202020204" pitchFamily="34" charset="0"/>
+              </a:rPr>
+              <a:t>Supports proactive, data-driven healthcare decision-making</a:t>
+            </a:r>
           </a:p>
         </p:txBody>
       </p:sp>
@@ -5094,7 +6131,7 @@
         <p:spPr>
           <a:xfrm>
             <a:off x="120623" y="1026942"/>
-            <a:ext cx="6287211" cy="4154984"/>
+            <a:ext cx="5471285" cy="2944396"/>
           </a:xfrm>
           <a:prstGeom prst="rect">
             <a:avLst/>
@@ -5107,151 +6144,39 @@
           </a:bodyPr>
           <a:lstStyle/>
           <a:p>
-            <a:pPr marL="171450" lvl="0" indent="-171450">
+            <a:pPr marL="171450" indent="-171450">
+              <a:spcAft>
+                <a:spcPts val="800"/>
+              </a:spcAft>
               <a:buFont typeface="Arial" panose="020B0604020202020204" pitchFamily="34" charset="0"/>
               <a:buChar char="•"/>
+              <a:tabLst>
+                <a:tab pos="4229100" algn="ctr"/>
+              </a:tabLst>
             </a:pPr>
             <a:r>
-              <a:rPr lang="en-IN" sz="1200" b="1" dirty="0"/>
-              <a:t>Healthcare Data Issues</a:t>
+              <a:rPr lang="en-US" sz="1200" dirty="0">
+                <a:latin typeface="Lato" panose="020F0502020204030203" pitchFamily="34" charset="0"/>
+                <a:ea typeface="+mn-lt"/>
+                <a:cs typeface="Arial" panose="020B0604020202020204" pitchFamily="34" charset="0"/>
+              </a:rPr>
+              <a:t> </a:t>
             </a:r>
             <a:r>
-              <a:rPr lang="en-IN" sz="1200" dirty="0"/>
-              <a:t>- Large volumes of data are collected daily but remain raw, inconsistent, and poorly structured. Poor data quality limits meaningful insights and informed decision-making.</a:t>
-            </a:r>
-          </a:p>
-          <a:p>
-            <a:pPr marL="171450" lvl="0" indent="-171450">
-              <a:buFont typeface="Arial" panose="020B0604020202020204" pitchFamily="34" charset="0"/>
-              <a:buChar char="•"/>
-            </a:pPr>
-            <a:r>
-              <a:rPr lang="en-IN" sz="1200" b="1" dirty="0"/>
-              <a:t>Decision-Making Needs</a:t>
+              <a:rPr lang="en-US" sz="1200" u="sng" dirty="0">
+                <a:latin typeface="Lato" panose="020F0502020204030203" pitchFamily="34" charset="0"/>
+                <a:ea typeface="+mn-lt"/>
+                <a:cs typeface="Arial" panose="020B0604020202020204" pitchFamily="34" charset="0"/>
+              </a:rPr>
+              <a:t>Data Issues</a:t>
             </a:r>
             <a:r>
-              <a:rPr lang="en-IN" sz="1200" dirty="0"/>
-              <a:t>- Clean, accurate, and well-visualized data is essential for healthcare administrators and clinicians. Current limitations lead to underutilization of available information.</a:t>
-            </a:r>
-          </a:p>
-          <a:p>
-            <a:pPr marL="171450" lvl="0" indent="-171450">
-              <a:buFont typeface="Arial" panose="020B0604020202020204" pitchFamily="34" charset="0"/>
-              <a:buChar char="•"/>
-            </a:pPr>
-            <a:r>
-              <a:rPr lang="en-IN" sz="1200" b="1" dirty="0"/>
-              <a:t>AI Opportunities and Skills Gap</a:t>
-            </a:r>
-            <a:r>
-              <a:rPr lang="en-IN" sz="1200" dirty="0"/>
-              <a:t>- Generative AI tools (e.g., Microsoft Copilot, AI chatbots) can accelerate data analysis. Effective use requires prompt engineering skills, which most professionals lack.</a:t>
-            </a:r>
-          </a:p>
-          <a:p>
-            <a:pPr marL="171450" lvl="0" indent="-171450">
-              <a:buFont typeface="Arial" panose="020B0604020202020204" pitchFamily="34" charset="0"/>
-              <a:buChar char="•"/>
-            </a:pPr>
-            <a:r>
-              <a:rPr lang="en-IN" sz="1200" b="1" dirty="0"/>
-              <a:t>Project Objectives</a:t>
-            </a:r>
-            <a:r>
-              <a:rPr lang="en-IN" sz="1200" dirty="0"/>
-              <a:t>- Apply data cleaning, analysis, visualization, and AI integration techniques. Demonstrate structured workflows that produce actionable insights in healthcare.</a:t>
-            </a:r>
-          </a:p>
-          <a:p>
-            <a:pPr marL="171450" lvl="0" indent="-171450">
-              <a:buFont typeface="Arial" panose="020B0604020202020204" pitchFamily="34" charset="0"/>
-              <a:buChar char="•"/>
-            </a:pPr>
-            <a:r>
-              <a:rPr lang="en-IN" sz="1200" b="1" dirty="0"/>
-              <a:t>Key Challenges Addressed</a:t>
-            </a:r>
-            <a:endParaRPr lang="en-IN" sz="1200" dirty="0"/>
-          </a:p>
-          <a:p>
-            <a:pPr marL="628650" lvl="1" indent="-171450">
-              <a:buFont typeface="Courier New" panose="02070309020205020404" pitchFamily="49" charset="0"/>
-              <a:buChar char="o"/>
-            </a:pPr>
-            <a:r>
-              <a:rPr lang="en-IN" sz="1200" dirty="0"/>
-              <a:t>Irregular patient data formatting prevents accurate tracking.</a:t>
-            </a:r>
-          </a:p>
-          <a:p>
-            <a:pPr marL="628650" lvl="1" indent="-171450">
-              <a:buFont typeface="Courier New" panose="02070309020205020404" pitchFamily="49" charset="0"/>
-              <a:buChar char="o"/>
-            </a:pPr>
-            <a:r>
-              <a:rPr lang="en-IN" sz="1200" dirty="0"/>
-              <a:t>Difficulty correlating medical conditions, medications, and test results.</a:t>
-            </a:r>
-          </a:p>
-          <a:p>
-            <a:pPr marL="628650" lvl="1" indent="-171450">
-              <a:buFont typeface="Courier New" panose="02070309020205020404" pitchFamily="49" charset="0"/>
-              <a:buChar char="o"/>
-            </a:pPr>
-            <a:r>
-              <a:rPr lang="en-IN" sz="1200" dirty="0"/>
-              <a:t>Fragmented patient histories across departments hinder comprehensive care.</a:t>
-            </a:r>
-          </a:p>
-          <a:p>
-            <a:pPr marL="628650" lvl="1" indent="-171450">
-              <a:buFont typeface="Courier New" panose="02070309020205020404" pitchFamily="49" charset="0"/>
-              <a:buChar char="o"/>
-            </a:pPr>
-            <a:r>
-              <a:rPr lang="en-IN" sz="1200" dirty="0"/>
-              <a:t>Limited visualization restricts identification of KPIs (e.g., bed occupancy, emergency admissions).</a:t>
-            </a:r>
-          </a:p>
-          <a:p>
-            <a:pPr marL="171450" lvl="0" indent="-171450">
-              <a:buFont typeface="Arial" panose="020B0604020202020204" pitchFamily="34" charset="0"/>
-              <a:buChar char="•"/>
-            </a:pPr>
-            <a:r>
-              <a:rPr lang="en-IN" sz="1200" b="1" dirty="0"/>
-              <a:t>Expected Outcomes</a:t>
-            </a:r>
-            <a:endParaRPr lang="en-IN" sz="1200" dirty="0"/>
-          </a:p>
-          <a:p>
-            <a:pPr marL="628650" lvl="1" indent="-171450">
-              <a:buFont typeface="Courier New" panose="02070309020205020404" pitchFamily="49" charset="0"/>
-              <a:buChar char="o"/>
-            </a:pPr>
-            <a:r>
-              <a:rPr lang="en-IN" sz="1200" dirty="0"/>
-              <a:t>Improved tracking of rates and chronic disease trends.</a:t>
-            </a:r>
-          </a:p>
-          <a:p>
-            <a:pPr marL="628650" lvl="1" indent="-171450">
-              <a:buFont typeface="Courier New" panose="02070309020205020404" pitchFamily="49" charset="0"/>
-              <a:buChar char="o"/>
-            </a:pPr>
-            <a:r>
-              <a:rPr lang="en-IN" sz="1200" dirty="0"/>
-              <a:t>Transition from reactive to proactive healthcare.</a:t>
-            </a:r>
-          </a:p>
-          <a:p>
-            <a:pPr marL="628650" lvl="1" indent="-171450">
-              <a:buFont typeface="Courier New" panose="02070309020205020404" pitchFamily="49" charset="0"/>
-              <a:buChar char="o"/>
-            </a:pPr>
-            <a:r>
-              <a:rPr lang="en-IN" sz="1200" dirty="0"/>
-              <a:t>Enhanced operational efficiency and patient outcomes through AI-assisted workflows.</a:t>
+              <a:rPr lang="en-US" sz="1200" dirty="0">
+                <a:latin typeface="Lato" panose="020F0502020204030203" pitchFamily="34" charset="0"/>
+                <a:ea typeface="+mn-lt"/>
+                <a:cs typeface="Arial" panose="020B0604020202020204" pitchFamily="34" charset="0"/>
+              </a:rPr>
+              <a:t>: Unstructured, inconsistent healthcare data limits reliable insights</a:t>
             </a:r>
           </a:p>
           <a:p>
@@ -5265,11 +6190,178 @@
                 <a:tab pos="4229100" algn="ctr"/>
               </a:tabLst>
             </a:pPr>
-            <a:endParaRPr lang="en-US" sz="1200" dirty="0">
-              <a:latin typeface="Lato" panose="020F0502020204030203" pitchFamily="34" charset="0"/>
-              <a:ea typeface="+mn-lt"/>
-              <a:cs typeface="Arial" panose="020B0604020202020204" pitchFamily="34" charset="0"/>
-            </a:endParaRPr>
+            <a:r>
+              <a:rPr lang="en-US" sz="1200" u="sng" dirty="0">
+                <a:latin typeface="Lato" panose="020F0502020204030203" pitchFamily="34" charset="0"/>
+                <a:ea typeface="+mn-lt"/>
+                <a:cs typeface="Arial" panose="020B0604020202020204" pitchFamily="34" charset="0"/>
+              </a:rPr>
+              <a:t>Decision Needs</a:t>
+            </a:r>
+            <a:r>
+              <a:rPr lang="en-US" sz="1200" dirty="0">
+                <a:latin typeface="Lato" panose="020F0502020204030203" pitchFamily="34" charset="0"/>
+                <a:ea typeface="+mn-lt"/>
+                <a:cs typeface="Arial" panose="020B0604020202020204" pitchFamily="34" charset="0"/>
+              </a:rPr>
+              <a:t>: Lack of clean, visualized data leads to underutilization</a:t>
+            </a:r>
+          </a:p>
+          <a:p>
+            <a:pPr marL="228600" indent="-228600">
+              <a:spcAft>
+                <a:spcPts val="800"/>
+              </a:spcAft>
+              <a:buFont typeface="Arial" panose="020B0604020202020204" pitchFamily="34" charset="0"/>
+              <a:buChar char="•"/>
+              <a:tabLst>
+                <a:tab pos="4229100" algn="ctr"/>
+              </a:tabLst>
+            </a:pPr>
+            <a:r>
+              <a:rPr lang="en-US" sz="1200" u="sng" dirty="0">
+                <a:latin typeface="Lato" panose="020F0502020204030203" pitchFamily="34" charset="0"/>
+                <a:ea typeface="+mn-lt"/>
+                <a:cs typeface="Arial" panose="020B0604020202020204" pitchFamily="34" charset="0"/>
+              </a:rPr>
+              <a:t>AI Scope</a:t>
+            </a:r>
+            <a:r>
+              <a:rPr lang="en-US" sz="1200" dirty="0">
+                <a:latin typeface="Lato" panose="020F0502020204030203" pitchFamily="34" charset="0"/>
+                <a:ea typeface="+mn-lt"/>
+                <a:cs typeface="Arial" panose="020B0604020202020204" pitchFamily="34" charset="0"/>
+              </a:rPr>
+              <a:t>: Generative AI enables faster analysis; skill gaps hinder adoption</a:t>
+            </a:r>
+          </a:p>
+          <a:p>
+            <a:pPr marL="228600" indent="-228600">
+              <a:spcAft>
+                <a:spcPts val="800"/>
+              </a:spcAft>
+              <a:buFont typeface="Arial" panose="020B0604020202020204" pitchFamily="34" charset="0"/>
+              <a:buChar char="•"/>
+              <a:tabLst>
+                <a:tab pos="4229100" algn="ctr"/>
+              </a:tabLst>
+            </a:pPr>
+            <a:r>
+              <a:rPr lang="en-US" sz="1200" u="sng" dirty="0">
+                <a:latin typeface="Lato" panose="020F0502020204030203" pitchFamily="34" charset="0"/>
+                <a:ea typeface="+mn-lt"/>
+                <a:cs typeface="Arial" panose="020B0604020202020204" pitchFamily="34" charset="0"/>
+              </a:rPr>
+              <a:t>Objectives</a:t>
+            </a:r>
+            <a:r>
+              <a:rPr lang="en-US" sz="1200" dirty="0">
+                <a:latin typeface="Lato" panose="020F0502020204030203" pitchFamily="34" charset="0"/>
+                <a:ea typeface="+mn-lt"/>
+                <a:cs typeface="Arial" panose="020B0604020202020204" pitchFamily="34" charset="0"/>
+              </a:rPr>
+              <a:t>: Data cleaning, analysis, visualization, and AI integration for actionable insights</a:t>
+            </a:r>
+          </a:p>
+          <a:p>
+            <a:pPr marL="228600" indent="-228600">
+              <a:spcAft>
+                <a:spcPts val="800"/>
+              </a:spcAft>
+              <a:buFont typeface="Arial" panose="020B0604020202020204" pitchFamily="34" charset="0"/>
+              <a:buChar char="•"/>
+              <a:tabLst>
+                <a:tab pos="4229100" algn="ctr"/>
+              </a:tabLst>
+            </a:pPr>
+            <a:r>
+              <a:rPr lang="en-US" sz="1200" u="sng" dirty="0">
+                <a:latin typeface="Lato" panose="020F0502020204030203" pitchFamily="34" charset="0"/>
+                <a:ea typeface="+mn-lt"/>
+                <a:cs typeface="Arial" panose="020B0604020202020204" pitchFamily="34" charset="0"/>
+              </a:rPr>
+              <a:t>Challenges:</a:t>
+            </a:r>
+          </a:p>
+          <a:p>
+            <a:pPr marL="228600" indent="-228600">
+              <a:spcAft>
+                <a:spcPts val="800"/>
+              </a:spcAft>
+              <a:buFont typeface="Wingdings" panose="05000000000000000000" pitchFamily="2" charset="2"/>
+              <a:buChar char="Ø"/>
+              <a:tabLst>
+                <a:tab pos="4229100" algn="ctr"/>
+              </a:tabLst>
+            </a:pPr>
+            <a:r>
+              <a:rPr lang="en-US" sz="1200" dirty="0">
+                <a:latin typeface="Lato" panose="020F0502020204030203" pitchFamily="34" charset="0"/>
+                <a:ea typeface="+mn-lt"/>
+                <a:cs typeface="Arial" panose="020B0604020202020204" pitchFamily="34" charset="0"/>
+              </a:rPr>
+              <a:t>  Inconsistent data formats</a:t>
+            </a:r>
+          </a:p>
+          <a:p>
+            <a:pPr marL="228600" indent="-228600">
+              <a:spcAft>
+                <a:spcPts val="800"/>
+              </a:spcAft>
+              <a:buFont typeface="Wingdings" panose="05000000000000000000" pitchFamily="2" charset="2"/>
+              <a:buChar char="Ø"/>
+              <a:tabLst>
+                <a:tab pos="4229100" algn="ctr"/>
+              </a:tabLst>
+            </a:pPr>
+            <a:r>
+              <a:rPr lang="en-US" sz="1200" dirty="0">
+                <a:latin typeface="Lato" panose="020F0502020204030203" pitchFamily="34" charset="0"/>
+                <a:ea typeface="+mn-lt"/>
+                <a:cs typeface="Arial" panose="020B0604020202020204" pitchFamily="34" charset="0"/>
+              </a:rPr>
+              <a:t>  Weak correlation across clinical variables</a:t>
+            </a:r>
+          </a:p>
+          <a:p>
+            <a:pPr marL="228600" indent="-228600">
+              <a:spcAft>
+                <a:spcPts val="800"/>
+              </a:spcAft>
+              <a:buFont typeface="Wingdings" panose="05000000000000000000" pitchFamily="2" charset="2"/>
+              <a:buChar char="Ø"/>
+              <a:tabLst>
+                <a:tab pos="4229100" algn="ctr"/>
+              </a:tabLst>
+            </a:pPr>
+            <a:r>
+              <a:rPr lang="en-US" sz="1200" dirty="0">
+                <a:latin typeface="Lato" panose="020F0502020204030203" pitchFamily="34" charset="0"/>
+                <a:ea typeface="+mn-lt"/>
+                <a:cs typeface="Arial" panose="020B0604020202020204" pitchFamily="34" charset="0"/>
+              </a:rPr>
+              <a:t>  Fragmented patient records</a:t>
+            </a:r>
+          </a:p>
+          <a:p>
+            <a:pPr marL="228600" indent="-228600">
+              <a:spcAft>
+                <a:spcPts val="800"/>
+              </a:spcAft>
+              <a:buFont typeface="Wingdings" panose="05000000000000000000" pitchFamily="2" charset="2"/>
+              <a:buChar char="Ø"/>
+              <a:tabLst>
+                <a:tab pos="4229100" algn="ctr"/>
+              </a:tabLst>
+            </a:pPr>
+            <a:r>
+              <a:rPr lang="en-US" sz="1200" dirty="0">
+                <a:latin typeface="Lato" panose="020F0502020204030203" pitchFamily="34" charset="0"/>
+                <a:ea typeface="+mn-lt"/>
+                <a:cs typeface="Arial" panose="020B0604020202020204" pitchFamily="34" charset="0"/>
+              </a:rPr>
+              <a:t>  Limited KPI visibility</a:t>
+            </a:r>
           </a:p>
         </p:txBody>
       </p:sp>
@@ -5430,9 +6522,46 @@
           <a:bodyPr wrap="square" rtlCol="0" anchor="t"/>
           <a:lstStyle/>
           <a:p>
+            <a:pPr marL="171450" indent="-171450">
+              <a:lnSpc>
+                <a:spcPct val="150000"/>
+              </a:lnSpc>
+              <a:buFont typeface="Arial" panose="020B0604020202020204" pitchFamily="34" charset="0"/>
+              <a:buChar char="•"/>
+            </a:pPr>
+            <a:r>
+              <a:rPr lang="en-US" sz="1200" dirty="0"/>
+              <a:t>The proposed solution leverages a structured five-phase framework consisting of data collection, cleaning, analysis, visualization, and documentation, which would transform fragmented hospital records into actionable insights.</a:t>
+            </a:r>
+          </a:p>
+          <a:p>
+            <a:pPr marL="171450" indent="-171450">
+              <a:lnSpc>
+                <a:spcPct val="150000"/>
+              </a:lnSpc>
+              <a:buFont typeface="Arial" panose="020B0604020202020204" pitchFamily="34" charset="0"/>
+              <a:buChar char="•"/>
+            </a:pPr>
+            <a:r>
+              <a:rPr lang="en-US" sz="1200" dirty="0"/>
+              <a:t> Using Excel and Power BI, we standardize formats, remove duplicates, and compute KPIs such as length of stay and admission trends. Copilot integration enhances analysis by generating summaries, interpreting trends, and recommending preventive care strategies. </a:t>
+            </a:r>
+          </a:p>
+          <a:p>
+            <a:pPr marL="171450" indent="-171450">
+              <a:lnSpc>
+                <a:spcPct val="150000"/>
+              </a:lnSpc>
+              <a:buFont typeface="Arial" panose="020B0604020202020204" pitchFamily="34" charset="0"/>
+              <a:buChar char="•"/>
+            </a:pPr>
+            <a:r>
+              <a:rPr lang="en-US" sz="1200" dirty="0"/>
+              <a:t>Interactive dashboards provide unified patient views; compared to traditional methods, this approach combines AI-driven prompt engineering with visualization, enabling proactive healthcare decisions, optimized resource utilization, and improved patient outcomes</a:t>
+            </a:r>
             <a:r>
               <a:rPr lang="en-US" sz="1600" dirty="0"/>
-              <a:t>The proposed solution leverages a structured five-phase framework—data collection, cleaning, analysis, visualization, and documentation—to transform fragmented hospital records into actionable insights. Using Excel and Power BI, we standardize formats, remove duplicates, and compute KPIs such as bed occupancy and admission trends. Copilot integration enhances analysis by generating summaries, interpreting trends, and recommending preventive care strategies. Interactive dashboards provide unified patient views and predictive models for readmission risks. Compared to traditional methods, this approach combines AI-driven prompt engineering with robust visualization, enabling proactive healthcare decisions, optimized resource utilization, and improved patient outcomes.</a:t>
+              <a:t>.</a:t>
             </a:r>
             <a:endParaRPr lang="en-US" sz="1600" dirty="0">
               <a:latin typeface="Lato" panose="020F0502020204030203" pitchFamily="34" charset="0"/>
@@ -5641,7 +6770,7 @@
           <a:lstStyle/>
           <a:p>
             <a:r>
-              <a:rPr lang="en-US" sz="1400" dirty="0">
+              <a:rPr lang="en-US" sz="1200" dirty="0">
                 <a:latin typeface="Arial" panose="020B0604020202020204" pitchFamily="34" charset="0"/>
                 <a:cs typeface="Arial" panose="020B0604020202020204" pitchFamily="34" charset="0"/>
               </a:rPr>
@@ -5781,7 +6910,7 @@
           <a:lstStyle/>
           <a:p>
             <a:r>
-              <a:rPr lang="en-US" sz="1400" dirty="0">
+              <a:rPr lang="en-US" sz="1200" dirty="0">
                 <a:solidFill>
                   <a:srgbClr val="1A1A2E"/>
                 </a:solidFill>
@@ -5792,14 +6921,14 @@
               <a:t>Data was cleaned by removing duplicates, </a:t>
             </a:r>
             <a:r>
-              <a:rPr lang="en-US" sz="1400" dirty="0">
+              <a:rPr lang="en-US" sz="1200" dirty="0">
                 <a:latin typeface="Arial" panose="020B0604020202020204" pitchFamily="34" charset="0"/>
                 <a:cs typeface="Arial" panose="020B0604020202020204" pitchFamily="34" charset="0"/>
               </a:rPr>
               <a:t>handling missing values, and standardizing formats in Excel, then transformed and analyzed using formulas, pivot tables, and Power BI and AI insights</a:t>
             </a:r>
             <a:r>
-              <a:rPr lang="en-US" sz="1600" dirty="0"/>
+              <a:rPr lang="en-US" sz="1200" dirty="0"/>
               <a:t>.</a:t>
             </a:r>
           </a:p>
@@ -5936,11 +7065,18 @@
           <a:lstStyle/>
           <a:p>
             <a:r>
+              <a:rPr lang="en-US" sz="1200" dirty="0">
+                <a:latin typeface="Arial" panose="020B0604020202020204" pitchFamily="34" charset="0"/>
+                <a:cs typeface="Arial" panose="020B0604020202020204" pitchFamily="34" charset="0"/>
+              </a:rPr>
+              <a:t>Excel was used for initial data cleaning and preprocessing, including handling missing values, removing duplicates, and applying formulas; Power BI was used develop interactive dashboards; Microsoft Copilot were integrated to generate insights, summarize findings, and assist in report writing through natural language prompts</a:t>
+            </a:r>
+            <a:r>
               <a:rPr lang="en-US" sz="1350" dirty="0">
                 <a:latin typeface="Arial" panose="020B0604020202020204" pitchFamily="34" charset="0"/>
                 <a:cs typeface="Arial" panose="020B0604020202020204" pitchFamily="34" charset="0"/>
               </a:rPr>
-              <a:t>Excel was used for initial data cleaning and preprocessing, including handling missing values, removing duplicates, and applying formulas; Power BI was used develop interactive dashboards; Microsoft Copilot were integrated to generate insights, summarize findings, and assist in report writing through natural language prompts.</a:t>
+              <a:t>.</a:t>
             </a:r>
           </a:p>
           <a:p>
@@ -6076,7 +7212,7 @@
           <a:lstStyle/>
           <a:p>
             <a:r>
-              <a:rPr lang="en-US" sz="1400" dirty="0">
+              <a:rPr lang="en-US" sz="1200" dirty="0">
                 <a:latin typeface="Arial" panose="020B0604020202020204" pitchFamily="34" charset="0"/>
                 <a:cs typeface="Arial" panose="020B0604020202020204" pitchFamily="34" charset="0"/>
               </a:rPr>
@@ -6219,7 +7355,7 @@
         </p:nvSpPr>
         <p:spPr>
           <a:xfrm>
-            <a:off x="978408" y="1648237"/>
+            <a:off x="1362456" y="1470233"/>
             <a:ext cx="1371600" cy="1371600"/>
           </a:xfrm>
           <a:prstGeom prst="ellipse">
@@ -6239,7 +7375,7 @@
           <a:bodyPr/>
           <a:lstStyle/>
           <a:p>
-            <a:endParaRPr lang="en-IN">
+            <a:endParaRPr lang="en-IN" dirty="0">
               <a:latin typeface="Lato" panose="020F0502020204030203" pitchFamily="34" charset="0"/>
             </a:endParaRPr>
           </a:p>
@@ -6253,8 +7389,8 @@
         </p:nvSpPr>
         <p:spPr>
           <a:xfrm>
-            <a:off x="274320" y="2196877"/>
-            <a:ext cx="2788920" cy="2651760"/>
+            <a:off x="395228" y="1849902"/>
+            <a:ext cx="3114032" cy="2780686"/>
           </a:xfrm>
           <a:prstGeom prst="rect">
             <a:avLst/>
@@ -6364,13 +7500,228 @@
       </p:sp>
       <p:sp>
         <p:nvSpPr>
+          <p:cNvPr id="15" name="Text 13"/>
+          <p:cNvSpPr/>
+          <p:nvPr/>
+        </p:nvSpPr>
+        <p:spPr>
+          <a:xfrm>
+            <a:off x="3218688" y="2413802"/>
+            <a:ext cx="2788920" cy="411480"/>
+          </a:xfrm>
+          <a:prstGeom prst="rect">
+            <a:avLst/>
+          </a:prstGeom>
+          <a:noFill/>
+          <a:ln/>
+        </p:spPr>
+        <p:txBody>
+          <a:bodyPr wrap="square" rtlCol="0" anchor="ctr"/>
+          <a:lstStyle/>
+          <a:p>
+            <a:pPr marL="0" indent="0" algn="ctr">
+              <a:buNone/>
+            </a:pPr>
+            <a:endParaRPr lang="en-US" sz="1600" dirty="0">
+              <a:latin typeface="Lato" panose="020F0502020204030203" pitchFamily="34" charset="0"/>
+              <a:cs typeface="Arial" panose="020B0604020202020204" pitchFamily="34" charset="0"/>
+            </a:endParaRPr>
+          </a:p>
+        </p:txBody>
+      </p:sp>
+      <p:sp>
+        <p:nvSpPr>
+          <p:cNvPr id="16" name="Text 14"/>
+          <p:cNvSpPr/>
+          <p:nvPr/>
+        </p:nvSpPr>
+        <p:spPr>
+          <a:xfrm>
+            <a:off x="3355848" y="2919838"/>
+            <a:ext cx="2514600" cy="1371600"/>
+          </a:xfrm>
+          <a:prstGeom prst="rect">
+            <a:avLst/>
+          </a:prstGeom>
+          <a:noFill/>
+          <a:ln/>
+        </p:spPr>
+        <p:txBody>
+          <a:bodyPr wrap="square" rtlCol="0" anchor="ctr"/>
+          <a:lstStyle/>
+          <a:p>
+            <a:pPr marL="0" indent="0" algn="ctr">
+              <a:buNone/>
+            </a:pPr>
+            <a:endParaRPr lang="en-US" sz="1600" dirty="0">
+              <a:latin typeface="Lato" panose="020F0502020204030203" pitchFamily="34" charset="0"/>
+              <a:cs typeface="Arial" panose="020B0604020202020204" pitchFamily="34" charset="0"/>
+            </a:endParaRPr>
+          </a:p>
+        </p:txBody>
+      </p:sp>
+      <p:sp>
+        <p:nvSpPr>
+          <p:cNvPr id="18" name="Text 16"/>
+          <p:cNvSpPr/>
+          <p:nvPr/>
+        </p:nvSpPr>
+        <p:spPr>
+          <a:xfrm>
+            <a:off x="6867144" y="1648237"/>
+            <a:ext cx="1371600" cy="1371600"/>
+          </a:xfrm>
+          <a:prstGeom prst="rect">
+            <a:avLst/>
+          </a:prstGeom>
+          <a:noFill/>
+          <a:ln/>
+        </p:spPr>
+        <p:txBody>
+          <a:bodyPr wrap="square" rtlCol="0" anchor="ctr"/>
+          <a:lstStyle/>
+          <a:p>
+            <a:pPr marL="0" indent="0" algn="ctr">
+              <a:buNone/>
+            </a:pPr>
+            <a:endParaRPr lang="en-US" sz="3600" dirty="0">
+              <a:latin typeface="Lato" panose="020F0502020204030203" pitchFamily="34" charset="0"/>
+            </a:endParaRPr>
+          </a:p>
+        </p:txBody>
+      </p:sp>
+      <p:sp>
+        <p:nvSpPr>
+          <p:cNvPr id="20" name="Text 18"/>
+          <p:cNvSpPr/>
+          <p:nvPr/>
+        </p:nvSpPr>
+        <p:spPr>
+          <a:xfrm>
+            <a:off x="6163056" y="2413802"/>
+            <a:ext cx="2788920" cy="411480"/>
+          </a:xfrm>
+          <a:prstGeom prst="rect">
+            <a:avLst/>
+          </a:prstGeom>
+          <a:noFill/>
+          <a:ln/>
+        </p:spPr>
+        <p:txBody>
+          <a:bodyPr wrap="square" rtlCol="0" anchor="ctr"/>
+          <a:lstStyle/>
+          <a:p>
+            <a:pPr marL="0" indent="0" algn="ctr">
+              <a:buNone/>
+            </a:pPr>
+            <a:endParaRPr lang="en-US" sz="1600" dirty="0">
+              <a:latin typeface="Lato" panose="020F0502020204030203" pitchFamily="34" charset="0"/>
+              <a:cs typeface="Arial" panose="020B0604020202020204" pitchFamily="34" charset="0"/>
+            </a:endParaRPr>
+          </a:p>
+        </p:txBody>
+      </p:sp>
+      <p:sp>
+        <p:nvSpPr>
+          <p:cNvPr id="21" name="Text 19"/>
+          <p:cNvSpPr/>
+          <p:nvPr/>
+        </p:nvSpPr>
+        <p:spPr>
+          <a:xfrm>
+            <a:off x="4818186" y="2096086"/>
+            <a:ext cx="2909254" cy="1730326"/>
+          </a:xfrm>
+          <a:prstGeom prst="rect">
+            <a:avLst/>
+          </a:prstGeom>
+          <a:noFill/>
+          <a:ln/>
+        </p:spPr>
+        <p:txBody>
+          <a:bodyPr wrap="square" rtlCol="0" anchor="ctr"/>
+          <a:lstStyle/>
+          <a:p>
+            <a:pPr algn="ctr"/>
+            <a:r>
+              <a:rPr lang="en-US" sz="1600" dirty="0">
+                <a:latin typeface="Lato" panose="020F0502020204030203" pitchFamily="34" charset="0"/>
+                <a:ea typeface="Calibri" pitchFamily="34" charset="-122"/>
+                <a:cs typeface="Arial" panose="020B0604020202020204" pitchFamily="34" charset="0"/>
+              </a:rPr>
+              <a:t>This screenshot shows the cleaned healthcare dataset with standardized formats, no duplicates, and consistent, analysis-ready data.</a:t>
+            </a:r>
+          </a:p>
+        </p:txBody>
+      </p:sp>
+      <p:pic>
+        <p:nvPicPr>
+          <p:cNvPr id="22" name="Picture 21">
+            <a:extLst>
+              <a:ext uri="{FF2B5EF4-FFF2-40B4-BE49-F238E27FC236}">
+                <a16:creationId xmlns:a16="http://schemas.microsoft.com/office/drawing/2014/main" id="{A4C3C6A9-7D01-B88E-52A1-E55CC02BB0C7}"/>
+              </a:ext>
+            </a:extLst>
+          </p:cNvPr>
+          <p:cNvPicPr>
+            <a:picLocks noChangeAspect="1"/>
+          </p:cNvPicPr>
+          <p:nvPr/>
+        </p:nvPicPr>
+        <p:blipFill>
+          <a:blip r:embed="rId4"/>
+          <a:srcRect r="19538" b="25614"/>
+          <a:stretch>
+            <a:fillRect/>
+          </a:stretch>
+        </p:blipFill>
+        <p:spPr>
+          <a:xfrm>
+            <a:off x="411480" y="1821566"/>
+            <a:ext cx="3410010" cy="2780686"/>
+          </a:xfrm>
+          <a:prstGeom prst="rect">
+            <a:avLst/>
+          </a:prstGeom>
+        </p:spPr>
+      </p:pic>
+    </p:spTree>
+    <p:custDataLst>
+      <p:tags r:id="rId1"/>
+    </p:custDataLst>
+  </p:cSld>
+  <p:clrMapOvr>
+    <a:masterClrMapping/>
+  </p:clrMapOvr>
+</p:sld>
+</file>
+
+<file path=ppt/slides/slide8.xml><?xml version="1.0" encoding="utf-8"?>
+<p:sld xmlns:a="http://schemas.openxmlformats.org/drawingml/2006/main" xmlns:r="http://schemas.openxmlformats.org/officeDocument/2006/relationships" xmlns:p="http://schemas.openxmlformats.org/presentationml/2006/main">
+  <p:cSld>
+    <p:spTree>
+      <p:nvGrpSpPr>
+        <p:cNvPr id="1" name=""/>
+        <p:cNvGrpSpPr/>
+        <p:nvPr/>
+      </p:nvGrpSpPr>
+      <p:grpSpPr>
+        <a:xfrm>
+          <a:off x="0" y="0"/>
+          <a:ext cx="0" cy="0"/>
+          <a:chOff x="0" y="0"/>
+          <a:chExt cx="0" cy="0"/>
+        </a:xfrm>
+      </p:grpSpPr>
+      <p:sp>
+        <p:nvSpPr>
           <p:cNvPr id="12" name="Shape 10"/>
           <p:cNvSpPr/>
           <p:nvPr/>
         </p:nvSpPr>
         <p:spPr>
           <a:xfrm>
-            <a:off x="3922776" y="1648237"/>
+            <a:off x="1403257" y="1026238"/>
             <a:ext cx="1371600" cy="1371600"/>
           </a:xfrm>
           <a:prstGeom prst="ellipse">
@@ -6390,8 +7741,56 @@
           <a:bodyPr/>
           <a:lstStyle/>
           <a:p>
-            <a:endParaRPr lang="en-IN">
+            <a:pPr algn="ctr"/>
+            <a:endParaRPr lang="en-US" sz="1400" dirty="0">
               <a:latin typeface="Lato" panose="020F0502020204030203" pitchFamily="34" charset="0"/>
+              <a:cs typeface="Arial" panose="020B0604020202020204" pitchFamily="34" charset="0"/>
+            </a:endParaRPr>
+          </a:p>
+        </p:txBody>
+      </p:sp>
+      <p:sp>
+        <p:nvSpPr>
+          <p:cNvPr id="2" name="TextBox 1">
+            <a:extLst>
+              <a:ext uri="{FF2B5EF4-FFF2-40B4-BE49-F238E27FC236}">
+                <a16:creationId xmlns:a16="http://schemas.microsoft.com/office/drawing/2014/main" id="{DFE33A44-A675-63C4-FABF-A0C66D26F941}"/>
+              </a:ext>
+            </a:extLst>
+          </p:cNvPr>
+          <p:cNvSpPr txBox="1"/>
+          <p:nvPr/>
+        </p:nvSpPr>
+        <p:spPr>
+          <a:xfrm>
+            <a:off x="351692" y="548640"/>
+            <a:ext cx="5859194" cy="400110"/>
+          </a:xfrm>
+          <a:prstGeom prst="rect">
+            <a:avLst/>
+          </a:prstGeom>
+          <a:noFill/>
+        </p:spPr>
+        <p:txBody>
+          <a:bodyPr wrap="square" rtlCol="0">
+            <a:spAutoFit/>
+          </a:bodyPr>
+          <a:lstStyle/>
+          <a:p>
+            <a:r>
+              <a:rPr lang="en-US" sz="2000" b="1" dirty="0">
+                <a:solidFill>
+                  <a:srgbClr val="1B3A8A"/>
+                </a:solidFill>
+                <a:latin typeface="Lato" panose="020F0502020204030203" pitchFamily="34" charset="0"/>
+                <a:ea typeface="Calibri" pitchFamily="34" charset="-122"/>
+                <a:cs typeface="Arial" panose="020B0604020202020204" pitchFamily="34" charset="0"/>
+              </a:rPr>
+              <a:t>Live Demo of Project</a:t>
+            </a:r>
+            <a:endParaRPr lang="en-US" sz="2000" dirty="0">
+              <a:latin typeface="Lato" panose="020F0502020204030203" pitchFamily="34" charset="0"/>
+              <a:cs typeface="Arial" panose="020B0604020202020204" pitchFamily="34" charset="0"/>
             </a:endParaRPr>
           </a:p>
         </p:txBody>
@@ -6404,8 +7803,8 @@
         </p:nvSpPr>
         <p:spPr>
           <a:xfrm>
-            <a:off x="3218688" y="2196877"/>
-            <a:ext cx="2788920" cy="2651760"/>
+            <a:off x="351692" y="1568432"/>
+            <a:ext cx="3716685" cy="3111278"/>
           </a:xfrm>
           <a:prstGeom prst="rect">
             <a:avLst/>
@@ -6432,84 +7831,102 @@
           </a:p>
         </p:txBody>
       </p:sp>
-      <p:sp>
-        <p:nvSpPr>
-          <p:cNvPr id="15" name="Text 13"/>
-          <p:cNvSpPr/>
-          <p:nvPr/>
-        </p:nvSpPr>
-        <p:spPr>
-          <a:xfrm>
-            <a:off x="3218688" y="2413802"/>
-            <a:ext cx="2788920" cy="411480"/>
+      <p:pic>
+        <p:nvPicPr>
+          <p:cNvPr id="8" name="Picture 7">
+            <a:extLst>
+              <a:ext uri="{FF2B5EF4-FFF2-40B4-BE49-F238E27FC236}">
+                <a16:creationId xmlns:a16="http://schemas.microsoft.com/office/drawing/2014/main" id="{1E55E186-77CA-90F3-CE2B-D9091070E225}"/>
+              </a:ext>
+            </a:extLst>
+          </p:cNvPr>
+          <p:cNvPicPr>
+            <a:picLocks noChangeAspect="1"/>
+          </p:cNvPicPr>
+          <p:nvPr/>
+        </p:nvPicPr>
+        <p:blipFill>
+          <a:blip r:embed="rId2"/>
+          <a:srcRect l="1932" t="19631" r="36903" b="7466"/>
+          <a:stretch>
+            <a:fillRect/>
+          </a:stretch>
+        </p:blipFill>
+        <p:spPr>
+          <a:xfrm>
+            <a:off x="351692" y="1645920"/>
+            <a:ext cx="3716685" cy="3033790"/>
+          </a:xfrm>
+          <a:prstGeom prst="rect">
+            <a:avLst/>
+          </a:prstGeom>
+        </p:spPr>
+      </p:pic>
+      <p:sp>
+        <p:nvSpPr>
+          <p:cNvPr id="4" name="TextBox 3">
+            <a:extLst>
+              <a:ext uri="{FF2B5EF4-FFF2-40B4-BE49-F238E27FC236}">
+                <a16:creationId xmlns:a16="http://schemas.microsoft.com/office/drawing/2014/main" id="{2AA44589-DDD9-DE7E-C3D7-6428E9AC9E25}"/>
+              </a:ext>
+            </a:extLst>
+          </p:cNvPr>
+          <p:cNvSpPr txBox="1"/>
+          <p:nvPr/>
+        </p:nvSpPr>
+        <p:spPr>
+          <a:xfrm>
+            <a:off x="4571999" y="1807698"/>
+            <a:ext cx="3594295" cy="1754326"/>
           </a:xfrm>
           <a:prstGeom prst="rect">
             <a:avLst/>
           </a:prstGeom>
           <a:noFill/>
-          <a:ln/>
-        </p:spPr>
-        <p:txBody>
-          <a:bodyPr wrap="square" rtlCol="0" anchor="ctr"/>
-          <a:lstStyle/>
-          <a:p>
-            <a:pPr marL="0" indent="0" algn="ctr">
-              <a:buNone/>
-            </a:pPr>
+        </p:spPr>
+        <p:txBody>
+          <a:bodyPr wrap="square">
+            <a:spAutoFit/>
+          </a:bodyPr>
+          <a:lstStyle/>
+          <a:p>
             <a:r>
-              <a:rPr lang="en-US" sz="1600" b="1" dirty="0">
-                <a:latin typeface="Lato" panose="020F0502020204030203" pitchFamily="34" charset="0"/>
-                <a:ea typeface="Calibri" pitchFamily="34" charset="-122"/>
-                <a:cs typeface="Arial" panose="020B0604020202020204" pitchFamily="34" charset="0"/>
-              </a:rPr>
-              <a:t>Demo 2</a:t>
+              <a:rPr lang="en-US" dirty="0"/>
+              <a:t>This screenshot displays the Power BI dashboard presenting key healthcare insights through interactive visuals, KPIs, and filters for effective data-driven decision-making.</a:t>
             </a:r>
-            <a:endParaRPr lang="en-US" sz="1600" dirty="0">
-              <a:latin typeface="Lato" panose="020F0502020204030203" pitchFamily="34" charset="0"/>
-              <a:cs typeface="Arial" panose="020B0604020202020204" pitchFamily="34" charset="0"/>
-            </a:endParaRPr>
-          </a:p>
-        </p:txBody>
-      </p:sp>
-      <p:sp>
-        <p:nvSpPr>
-          <p:cNvPr id="16" name="Text 14"/>
-          <p:cNvSpPr/>
-          <p:nvPr/>
-        </p:nvSpPr>
-        <p:spPr>
-          <a:xfrm>
-            <a:off x="3355848" y="2919838"/>
-            <a:ext cx="2514600" cy="1371600"/>
-          </a:xfrm>
-          <a:prstGeom prst="rect">
-            <a:avLst/>
-          </a:prstGeom>
-          <a:noFill/>
-          <a:ln/>
-        </p:spPr>
-        <p:txBody>
-          <a:bodyPr wrap="square" rtlCol="0" anchor="ctr"/>
-          <a:lstStyle/>
-          <a:p>
-            <a:pPr marL="0" indent="0" algn="ctr">
-              <a:buNone/>
-            </a:pPr>
-            <a:r>
-              <a:rPr lang="en-US" sz="1600" dirty="0">
-                <a:latin typeface="Lato" panose="020F0502020204030203" pitchFamily="34" charset="0"/>
-                <a:ea typeface="Calibri" pitchFamily="34" charset="-122"/>
-                <a:cs typeface="Arial" panose="020B0604020202020204" pitchFamily="34" charset="0"/>
-              </a:rPr>
-              <a:t>[Add description of Demo 2 here — what this demo shows, key features, and results achieved.]</a:t>
-            </a:r>
-            <a:endParaRPr lang="en-US" sz="1600" dirty="0">
-              <a:latin typeface="Lato" panose="020F0502020204030203" pitchFamily="34" charset="0"/>
-              <a:cs typeface="Arial" panose="020B0604020202020204" pitchFamily="34" charset="0"/>
-            </a:endParaRPr>
-          </a:p>
-        </p:txBody>
-      </p:sp>
+          </a:p>
+        </p:txBody>
+      </p:sp>
+    </p:spTree>
+    <p:extLst>
+      <p:ext uri="{BB962C8B-B14F-4D97-AF65-F5344CB8AC3E}">
+        <p14:creationId xmlns:p14="http://schemas.microsoft.com/office/powerpoint/2010/main" val="3330356273"/>
+      </p:ext>
+    </p:extLst>
+  </p:cSld>
+  <p:clrMapOvr>
+    <a:masterClrMapping/>
+  </p:clrMapOvr>
+</p:sld>
+</file>
+
+<file path=ppt/slides/slide9.xml><?xml version="1.0" encoding="utf-8"?>
+<p:sld xmlns:a="http://schemas.openxmlformats.org/drawingml/2006/main" xmlns:r="http://schemas.openxmlformats.org/officeDocument/2006/relationships" xmlns:p="http://schemas.openxmlformats.org/presentationml/2006/main">
+  <p:cSld>
+    <p:spTree>
+      <p:nvGrpSpPr>
+        <p:cNvPr id="1" name=""/>
+        <p:cNvGrpSpPr/>
+        <p:nvPr/>
+      </p:nvGrpSpPr>
+      <p:grpSpPr>
+        <a:xfrm>
+          <a:off x="0" y="0"/>
+          <a:ext cx="0" cy="0"/>
+          <a:chOff x="0" y="0"/>
+          <a:chExt cx="0" cy="0"/>
+        </a:xfrm>
+      </p:grpSpPr>
       <p:sp>
         <p:nvSpPr>
           <p:cNvPr id="17" name="Shape 15"/>
@@ -6518,7 +7935,7 @@
         </p:nvSpPr>
         <p:spPr>
           <a:xfrm>
-            <a:off x="6867144" y="1648237"/>
+            <a:off x="1465150" y="1261375"/>
             <a:ext cx="1371600" cy="1371600"/>
           </a:xfrm>
           <a:prstGeom prst="ellipse">
@@ -6538,7 +7955,7 @@
           <a:bodyPr/>
           <a:lstStyle/>
           <a:p>
-            <a:endParaRPr lang="en-IN">
+            <a:endParaRPr lang="en-IN" dirty="0">
               <a:latin typeface="Lato" panose="020F0502020204030203" pitchFamily="34" charset="0"/>
             </a:endParaRPr>
           </a:p>
@@ -6546,44 +7963,14 @@
       </p:sp>
       <p:sp>
         <p:nvSpPr>
-          <p:cNvPr id="18" name="Text 16"/>
-          <p:cNvSpPr/>
-          <p:nvPr/>
-        </p:nvSpPr>
-        <p:spPr>
-          <a:xfrm>
-            <a:off x="6867144" y="1648237"/>
-            <a:ext cx="1371600" cy="1371600"/>
-          </a:xfrm>
-          <a:prstGeom prst="rect">
-            <a:avLst/>
-          </a:prstGeom>
-          <a:noFill/>
-          <a:ln/>
-        </p:spPr>
-        <p:txBody>
-          <a:bodyPr wrap="square" rtlCol="0" anchor="ctr"/>
-          <a:lstStyle/>
-          <a:p>
-            <a:pPr marL="0" indent="0" algn="ctr">
-              <a:buNone/>
-            </a:pPr>
-            <a:endParaRPr lang="en-US" sz="3600" dirty="0">
-              <a:latin typeface="Lato" panose="020F0502020204030203" pitchFamily="34" charset="0"/>
-            </a:endParaRPr>
-          </a:p>
-        </p:txBody>
-      </p:sp>
-      <p:sp>
-        <p:nvSpPr>
           <p:cNvPr id="19" name="Shape 17"/>
           <p:cNvSpPr/>
           <p:nvPr/>
         </p:nvSpPr>
         <p:spPr>
           <a:xfrm>
-            <a:off x="6163056" y="2200479"/>
-            <a:ext cx="2788920" cy="2651760"/>
+            <a:off x="390730" y="1695156"/>
+            <a:ext cx="3428648" cy="2961249"/>
           </a:xfrm>
           <a:prstGeom prst="rect">
             <a:avLst/>
@@ -6613,146 +8000,6 @@
           </a:p>
         </p:txBody>
       </p:sp>
-      <p:sp>
-        <p:nvSpPr>
-          <p:cNvPr id="20" name="Text 18"/>
-          <p:cNvSpPr/>
-          <p:nvPr/>
-        </p:nvSpPr>
-        <p:spPr>
-          <a:xfrm>
-            <a:off x="6163056" y="2413802"/>
-            <a:ext cx="2788920" cy="411480"/>
-          </a:xfrm>
-          <a:prstGeom prst="rect">
-            <a:avLst/>
-          </a:prstGeom>
-          <a:noFill/>
-          <a:ln/>
-        </p:spPr>
-        <p:txBody>
-          <a:bodyPr wrap="square" rtlCol="0" anchor="ctr"/>
-          <a:lstStyle/>
-          <a:p>
-            <a:pPr marL="0" indent="0" algn="ctr">
-              <a:buNone/>
-            </a:pPr>
-            <a:r>
-              <a:rPr lang="en-US" sz="1600" b="1" dirty="0">
-                <a:latin typeface="Lato" panose="020F0502020204030203" pitchFamily="34" charset="0"/>
-                <a:ea typeface="Calibri" pitchFamily="34" charset="-122"/>
-                <a:cs typeface="Arial" panose="020B0604020202020204" pitchFamily="34" charset="0"/>
-              </a:rPr>
-              <a:t>Demo 3</a:t>
-            </a:r>
-            <a:endParaRPr lang="en-US" sz="1600" dirty="0">
-              <a:latin typeface="Lato" panose="020F0502020204030203" pitchFamily="34" charset="0"/>
-              <a:cs typeface="Arial" panose="020B0604020202020204" pitchFamily="34" charset="0"/>
-            </a:endParaRPr>
-          </a:p>
-        </p:txBody>
-      </p:sp>
-      <p:sp>
-        <p:nvSpPr>
-          <p:cNvPr id="21" name="Text 19"/>
-          <p:cNvSpPr/>
-          <p:nvPr/>
-        </p:nvSpPr>
-        <p:spPr>
-          <a:xfrm>
-            <a:off x="6300216" y="2919838"/>
-            <a:ext cx="2514600" cy="1371600"/>
-          </a:xfrm>
-          <a:prstGeom prst="rect">
-            <a:avLst/>
-          </a:prstGeom>
-          <a:noFill/>
-          <a:ln/>
-        </p:spPr>
-        <p:txBody>
-          <a:bodyPr wrap="square" rtlCol="0" anchor="ctr"/>
-          <a:lstStyle/>
-          <a:p>
-            <a:pPr marL="0" indent="0" algn="ctr">
-              <a:buNone/>
-            </a:pPr>
-            <a:r>
-              <a:rPr lang="en-US" sz="1600" dirty="0">
-                <a:latin typeface="Lato" panose="020F0502020204030203" pitchFamily="34" charset="0"/>
-                <a:ea typeface="Calibri" pitchFamily="34" charset="-122"/>
-                <a:cs typeface="Arial" panose="020B0604020202020204" pitchFamily="34" charset="0"/>
-              </a:rPr>
-              <a:t>[Add description of Demo 3 here — what this demo shows, key features, and results achieved.]</a:t>
-            </a:r>
-            <a:endParaRPr lang="en-US" sz="1600" dirty="0">
-              <a:latin typeface="Lato" panose="020F0502020204030203" pitchFamily="34" charset="0"/>
-              <a:cs typeface="Arial" panose="020B0604020202020204" pitchFamily="34" charset="0"/>
-            </a:endParaRPr>
-          </a:p>
-        </p:txBody>
-      </p:sp>
-      <p:pic>
-        <p:nvPicPr>
-          <p:cNvPr id="8" name="Picture 7">
-            <a:extLst>
-              <a:ext uri="{FF2B5EF4-FFF2-40B4-BE49-F238E27FC236}">
-                <a16:creationId xmlns:a16="http://schemas.microsoft.com/office/drawing/2014/main" id="{1E55E186-77CA-90F3-CE2B-D9091070E225}"/>
-              </a:ext>
-            </a:extLst>
-          </p:cNvPr>
-          <p:cNvPicPr>
-            <a:picLocks noChangeAspect="1"/>
-          </p:cNvPicPr>
-          <p:nvPr/>
-        </p:nvPicPr>
-        <p:blipFill>
-          <a:blip r:embed="rId4"/>
-          <a:srcRect l="1932" t="19631" r="36903" b="7466"/>
-          <a:stretch>
-            <a:fillRect/>
-          </a:stretch>
-        </p:blipFill>
-        <p:spPr>
-          <a:xfrm>
-            <a:off x="3218688" y="2196877"/>
-            <a:ext cx="2807208" cy="2651760"/>
-          </a:xfrm>
-          <a:prstGeom prst="rect">
-            <a:avLst/>
-          </a:prstGeom>
-        </p:spPr>
-      </p:pic>
-      <p:pic>
-        <p:nvPicPr>
-          <p:cNvPr id="22" name="Picture 21">
-            <a:extLst>
-              <a:ext uri="{FF2B5EF4-FFF2-40B4-BE49-F238E27FC236}">
-                <a16:creationId xmlns:a16="http://schemas.microsoft.com/office/drawing/2014/main" id="{A4C3C6A9-7D01-B88E-52A1-E55CC02BB0C7}"/>
-              </a:ext>
-            </a:extLst>
-          </p:cNvPr>
-          <p:cNvPicPr>
-            <a:picLocks noChangeAspect="1"/>
-          </p:cNvPicPr>
-          <p:nvPr/>
-        </p:nvPicPr>
-        <p:blipFill>
-          <a:blip r:embed="rId5"/>
-          <a:srcRect r="19538" b="25614"/>
-          <a:stretch>
-            <a:fillRect/>
-          </a:stretch>
-        </p:blipFill>
-        <p:spPr>
-          <a:xfrm>
-            <a:off x="283464" y="2301722"/>
-            <a:ext cx="2779776" cy="2442069"/>
-          </a:xfrm>
-          <a:prstGeom prst="rect">
-            <a:avLst/>
-          </a:prstGeom>
-        </p:spPr>
-      </p:pic>
       <p:pic>
         <p:nvPicPr>
           <p:cNvPr id="24" name="Picture 23">
@@ -6768,7 +8015,7 @@
           <p:nvPr/>
         </p:nvPicPr>
         <p:blipFill>
-          <a:blip r:embed="rId6"/>
+          <a:blip r:embed="rId2"/>
           <a:srcRect l="31100" r="16308"/>
           <a:stretch>
             <a:fillRect/>
@@ -6776,443 +8023,44 @@
         </p:blipFill>
         <p:spPr>
           <a:xfrm>
-            <a:off x="6177109" y="2196877"/>
-            <a:ext cx="2843109" cy="2651760"/>
+            <a:off x="390730" y="1695156"/>
+            <a:ext cx="3428648" cy="2939466"/>
           </a:xfrm>
           <a:prstGeom prst="rect">
             <a:avLst/>
           </a:prstGeom>
         </p:spPr>
       </p:pic>
-    </p:spTree>
-    <p:custDataLst>
-      <p:tags r:id="rId1"/>
-    </p:custDataLst>
-  </p:cSld>
-  <p:clrMapOvr>
-    <a:masterClrMapping/>
-  </p:clrMapOvr>
-</p:sld>
-</file>
-
-<file path=ppt/slides/slide8.xml><?xml version="1.0" encoding="utf-8"?>
-<p:sld xmlns:a="http://schemas.openxmlformats.org/drawingml/2006/main" xmlns:r="http://schemas.openxmlformats.org/officeDocument/2006/relationships" xmlns:p="http://schemas.openxmlformats.org/presentationml/2006/main">
-  <p:cSld name="Slide 8">
-    <p:bg>
-      <p:bgPr>
-        <a:solidFill>
-          <a:srgbClr val="FFFFFF"/>
-        </a:solidFill>
-        <a:effectLst/>
-      </p:bgPr>
-    </p:bg>
-    <p:spTree>
-      <p:nvGrpSpPr>
-        <p:cNvPr id="1" name=""/>
-        <p:cNvGrpSpPr/>
-        <p:nvPr/>
-      </p:nvGrpSpPr>
-      <p:grpSpPr>
-        <a:xfrm>
-          <a:off x="0" y="0"/>
-          <a:ext cx="0" cy="0"/>
-          <a:chOff x="0" y="0"/>
-          <a:chExt cx="0" cy="0"/>
-        </a:xfrm>
-      </p:grpSpPr>
-      <p:sp>
-        <p:nvSpPr>
-          <p:cNvPr id="4" name="Text 2"/>
-          <p:cNvSpPr/>
-          <p:nvPr/>
-        </p:nvSpPr>
-        <p:spPr>
-          <a:xfrm>
-            <a:off x="320040" y="621792"/>
-            <a:ext cx="8229600" cy="438912"/>
+      <p:sp>
+        <p:nvSpPr>
+          <p:cNvPr id="3" name="TextBox 2">
+            <a:extLst>
+              <a:ext uri="{FF2B5EF4-FFF2-40B4-BE49-F238E27FC236}">
+                <a16:creationId xmlns:a16="http://schemas.microsoft.com/office/drawing/2014/main" id="{8912A0C5-DF62-7604-C730-E673567306C8}"/>
+              </a:ext>
+            </a:extLst>
+          </p:cNvPr>
+          <p:cNvSpPr txBox="1"/>
+          <p:nvPr/>
+        </p:nvSpPr>
+        <p:spPr>
+          <a:xfrm>
+            <a:off x="309489" y="508878"/>
+            <a:ext cx="4572000" cy="369332"/>
           </a:xfrm>
           <a:prstGeom prst="rect">
             <a:avLst/>
           </a:prstGeom>
           <a:noFill/>
-          <a:ln/>
-        </p:spPr>
-        <p:txBody>
-          <a:bodyPr wrap="square" rtlCol="0" anchor="ctr"/>
-          <a:lstStyle/>
-          <a:p>
-            <a:pPr marL="0" indent="0">
-              <a:buNone/>
-            </a:pPr>
+        </p:spPr>
+        <p:txBody>
+          <a:bodyPr wrap="square">
+            <a:spAutoFit/>
+          </a:bodyPr>
+          <a:lstStyle/>
+          <a:p>
             <a:r>
-              <a:rPr lang="en-US" sz="2200" b="1" dirty="0">
-                <a:solidFill>
-                  <a:srgbClr val="1B3A8A"/>
-                </a:solidFill>
-                <a:latin typeface="Calibri" pitchFamily="34" charset="0"/>
-                <a:ea typeface="Calibri" pitchFamily="34" charset="-122"/>
-                <a:cs typeface="Calibri" pitchFamily="34" charset="-120"/>
-              </a:rPr>
-              <a:t>Video of Project Demo</a:t>
-            </a:r>
-            <a:endParaRPr lang="en-US" sz="2200" dirty="0"/>
-          </a:p>
-        </p:txBody>
-      </p:sp>
-      <p:sp>
-        <p:nvSpPr>
-          <p:cNvPr id="6" name="Shape 4"/>
-          <p:cNvSpPr/>
-          <p:nvPr/>
-        </p:nvSpPr>
-        <p:spPr>
-          <a:xfrm>
-            <a:off x="365760" y="685800"/>
-            <a:ext cx="8412480" cy="3977640"/>
-          </a:xfrm>
-          <a:prstGeom prst="rect">
-            <a:avLst/>
-          </a:prstGeom>
-          <a:solidFill>
-            <a:srgbClr val="ECEFF1"/>
-          </a:solidFill>
-          <a:ln w="25400">
-            <a:solidFill>
-              <a:srgbClr val="1B3A8A"/>
-            </a:solidFill>
-            <a:prstDash val="solid"/>
-          </a:ln>
-        </p:spPr>
-        <p:txBody>
-          <a:bodyPr/>
-          <a:lstStyle/>
-          <a:p>
-            <a:endParaRPr lang="en-IN"/>
-          </a:p>
-        </p:txBody>
-      </p:sp>
-      <p:sp>
-        <p:nvSpPr>
-          <p:cNvPr id="7" name="Shape 5"/>
-          <p:cNvSpPr/>
-          <p:nvPr/>
-        </p:nvSpPr>
-        <p:spPr>
-          <a:xfrm>
-            <a:off x="365760" y="685800"/>
-            <a:ext cx="8412480" cy="384048"/>
-          </a:xfrm>
-          <a:prstGeom prst="rect">
-            <a:avLst/>
-          </a:prstGeom>
-          <a:solidFill>
-            <a:srgbClr val="E0E0E0"/>
-          </a:solidFill>
-          <a:ln/>
-        </p:spPr>
-        <p:txBody>
-          <a:bodyPr/>
-          <a:lstStyle/>
-          <a:p>
-            <a:endParaRPr lang="en-IN"/>
-          </a:p>
-        </p:txBody>
-      </p:sp>
-      <p:sp>
-        <p:nvSpPr>
-          <p:cNvPr id="8" name="Shape 6"/>
-          <p:cNvSpPr/>
-          <p:nvPr/>
-        </p:nvSpPr>
-        <p:spPr>
-          <a:xfrm>
-            <a:off x="502920" y="777240"/>
-            <a:ext cx="164592" cy="164592"/>
-          </a:xfrm>
-          <a:prstGeom prst="ellipse">
-            <a:avLst/>
-          </a:prstGeom>
-          <a:solidFill>
-            <a:srgbClr val="FF5F57"/>
-          </a:solidFill>
-          <a:ln/>
-        </p:spPr>
-        <p:txBody>
-          <a:bodyPr/>
-          <a:lstStyle/>
-          <a:p>
-            <a:endParaRPr lang="en-IN"/>
-          </a:p>
-        </p:txBody>
-      </p:sp>
-      <p:sp>
-        <p:nvSpPr>
-          <p:cNvPr id="9" name="Shape 7"/>
-          <p:cNvSpPr/>
-          <p:nvPr/>
-        </p:nvSpPr>
-        <p:spPr>
-          <a:xfrm>
-            <a:off x="731520" y="777240"/>
-            <a:ext cx="164592" cy="164592"/>
-          </a:xfrm>
-          <a:prstGeom prst="ellipse">
-            <a:avLst/>
-          </a:prstGeom>
-          <a:solidFill>
-            <a:srgbClr val="FEBC2E"/>
-          </a:solidFill>
-          <a:ln/>
-        </p:spPr>
-        <p:txBody>
-          <a:bodyPr/>
-          <a:lstStyle/>
-          <a:p>
-            <a:endParaRPr lang="en-IN"/>
-          </a:p>
-        </p:txBody>
-      </p:sp>
-      <p:sp>
-        <p:nvSpPr>
-          <p:cNvPr id="10" name="Shape 8"/>
-          <p:cNvSpPr/>
-          <p:nvPr/>
-        </p:nvSpPr>
-        <p:spPr>
-          <a:xfrm>
-            <a:off x="960120" y="777240"/>
-            <a:ext cx="164592" cy="164592"/>
-          </a:xfrm>
-          <a:prstGeom prst="ellipse">
-            <a:avLst/>
-          </a:prstGeom>
-          <a:solidFill>
-            <a:srgbClr val="28C840"/>
-          </a:solidFill>
-          <a:ln/>
-        </p:spPr>
-        <p:txBody>
-          <a:bodyPr/>
-          <a:lstStyle/>
-          <a:p>
-            <a:endParaRPr lang="en-IN"/>
-          </a:p>
-        </p:txBody>
-      </p:sp>
-      <p:sp>
-        <p:nvSpPr>
-          <p:cNvPr id="12" name="Text 10"/>
-          <p:cNvSpPr/>
-          <p:nvPr/>
-        </p:nvSpPr>
-        <p:spPr>
-          <a:xfrm>
-            <a:off x="1389888" y="768096"/>
-            <a:ext cx="7205472" cy="292608"/>
-          </a:xfrm>
-          <a:prstGeom prst="rect">
-            <a:avLst/>
-          </a:prstGeom>
-          <a:noFill/>
-          <a:ln/>
-        </p:spPr>
-        <p:txBody>
-          <a:bodyPr wrap="square" rtlCol="0" anchor="ctr"/>
-          <a:lstStyle/>
-          <a:p>
-            <a:r>
-              <a:rPr lang="en-IN" sz="1200" u="sng" dirty="0">
-                <a:hlinkClick r:id="rId4"/>
-              </a:rPr>
-              <a:t>https://1drv.ms/v/c/D1FD93578F9E8C8C/IQBnqRj4Yu6hTp_tWBOeDdYSAaGVZuHmiJ-zouaw8Fbe6vs?e=SOLEml</a:t>
-            </a:r>
-            <a:endParaRPr lang="en-US" sz="1200" dirty="0"/>
-          </a:p>
-        </p:txBody>
-      </p:sp>
-      <p:sp>
-        <p:nvSpPr>
-          <p:cNvPr id="13" name="Shape 11"/>
-          <p:cNvSpPr/>
-          <p:nvPr/>
-        </p:nvSpPr>
-        <p:spPr>
-          <a:xfrm>
-            <a:off x="3749040" y="1828800"/>
-            <a:ext cx="1645920" cy="1645920"/>
-          </a:xfrm>
-          <a:prstGeom prst="ellipse">
-            <a:avLst/>
-          </a:prstGeom>
-          <a:solidFill>
-            <a:srgbClr val="1B3A8A">
-              <a:alpha val="80000"/>
-            </a:srgbClr>
-          </a:solidFill>
-          <a:ln/>
-        </p:spPr>
-        <p:txBody>
-          <a:bodyPr/>
-          <a:lstStyle/>
-          <a:p>
-            <a:endParaRPr lang="en-IN"/>
-          </a:p>
-        </p:txBody>
-      </p:sp>
-      <p:sp>
-        <p:nvSpPr>
-          <p:cNvPr id="14" name="Text 12"/>
-          <p:cNvSpPr/>
-          <p:nvPr/>
-        </p:nvSpPr>
-        <p:spPr>
-          <a:xfrm>
-            <a:off x="3749040" y="1828800"/>
-            <a:ext cx="1645920" cy="1645920"/>
-          </a:xfrm>
-          <a:prstGeom prst="rect">
-            <a:avLst/>
-          </a:prstGeom>
-          <a:noFill/>
-          <a:ln/>
-        </p:spPr>
-        <p:txBody>
-          <a:bodyPr wrap="square" rtlCol="0" anchor="ctr"/>
-          <a:lstStyle/>
-          <a:p>
-            <a:pPr marL="0" indent="0" algn="ctr">
-              <a:buNone/>
-            </a:pPr>
-            <a:r>
-              <a:rPr lang="en-US" sz="4800" dirty="0">
-                <a:solidFill>
-                  <a:srgbClr val="FFFFFF"/>
-                </a:solidFill>
-              </a:rPr>
-              <a:t>▶</a:t>
-            </a:r>
-            <a:endParaRPr lang="en-US" sz="4800" dirty="0"/>
-          </a:p>
-        </p:txBody>
-      </p:sp>
-      <p:sp>
-        <p:nvSpPr>
-          <p:cNvPr id="15" name="Text 13"/>
-          <p:cNvSpPr/>
-          <p:nvPr/>
-        </p:nvSpPr>
-        <p:spPr>
-          <a:xfrm>
-            <a:off x="914400" y="3794760"/>
-            <a:ext cx="7315200" cy="594360"/>
-          </a:xfrm>
-          <a:prstGeom prst="rect">
-            <a:avLst/>
-          </a:prstGeom>
-          <a:noFill/>
-          <a:ln/>
-        </p:spPr>
-        <p:txBody>
-          <a:bodyPr wrap="square" rtlCol="0" anchor="ctr"/>
-          <a:lstStyle/>
-          <a:p>
-            <a:pPr marL="0" indent="0" algn="ctr">
-              <a:buNone/>
-            </a:pPr>
-            <a:r>
-              <a:rPr lang="en-US" sz="1100" i="1" dirty="0">
-                <a:solidFill>
-                  <a:srgbClr val="607D8B"/>
-                </a:solidFill>
-                <a:latin typeface="Calibri" pitchFamily="34" charset="0"/>
-                <a:ea typeface="Calibri" pitchFamily="34" charset="-122"/>
-                <a:cs typeface="Calibri" pitchFamily="34" charset="-120"/>
-              </a:rPr>
-              <a:t>[Insert your project demo video.</a:t>
-            </a:r>
-            <a:endParaRPr lang="en-US" sz="1100" dirty="0"/>
-          </a:p>
-          <a:p>
-            <a:pPr marL="0" indent="0" algn="ctr">
-              <a:buNone/>
-            </a:pPr>
-            <a:r>
-              <a:rPr lang="en-US" sz="1100" i="1" dirty="0">
-                <a:solidFill>
-                  <a:srgbClr val="607D8B"/>
-                </a:solidFill>
-                <a:latin typeface="Calibri" pitchFamily="34" charset="0"/>
-                <a:ea typeface="Calibri" pitchFamily="34" charset="-122"/>
-                <a:cs typeface="Calibri" pitchFamily="34" charset="-120"/>
-              </a:rPr>
-              <a:t>You can embed a video your live project.]</a:t>
-            </a:r>
-            <a:endParaRPr lang="en-US" sz="1100" dirty="0"/>
-          </a:p>
-        </p:txBody>
-      </p:sp>
-    </p:spTree>
-    <p:custDataLst>
-      <p:tags r:id="rId1"/>
-    </p:custDataLst>
-  </p:cSld>
-  <p:clrMapOvr>
-    <a:masterClrMapping/>
-  </p:clrMapOvr>
-</p:sld>
-</file>
-
-<file path=ppt/slides/slide9.xml><?xml version="1.0" encoding="utf-8"?>
-<p:sld xmlns:a="http://schemas.openxmlformats.org/drawingml/2006/main" xmlns:r="http://schemas.openxmlformats.org/officeDocument/2006/relationships" xmlns:p="http://schemas.openxmlformats.org/presentationml/2006/main">
-  <p:cSld name="Slide 9">
-    <p:bg>
-      <p:bgPr>
-        <a:solidFill>
-          <a:srgbClr val="FFFFFF"/>
-        </a:solidFill>
-        <a:effectLst/>
-      </p:bgPr>
-    </p:bg>
-    <p:spTree>
-      <p:nvGrpSpPr>
-        <p:cNvPr id="1" name=""/>
-        <p:cNvGrpSpPr/>
-        <p:nvPr/>
-      </p:nvGrpSpPr>
-      <p:grpSpPr>
-        <a:xfrm>
-          <a:off x="0" y="0"/>
-          <a:ext cx="0" cy="0"/>
-          <a:chOff x="0" y="0"/>
-          <a:chExt cx="0" cy="0"/>
-        </a:xfrm>
-      </p:grpSpPr>
-      <p:sp>
-        <p:nvSpPr>
-          <p:cNvPr id="4" name="Text 2"/>
-          <p:cNvSpPr/>
-          <p:nvPr/>
-        </p:nvSpPr>
-        <p:spPr>
-          <a:xfrm>
-            <a:off x="130351" y="612064"/>
-            <a:ext cx="8229600" cy="438912"/>
-          </a:xfrm>
-          <a:prstGeom prst="rect">
-            <a:avLst/>
-          </a:prstGeom>
-          <a:noFill/>
-          <a:ln/>
-        </p:spPr>
-        <p:txBody>
-          <a:bodyPr wrap="square" rtlCol="0" anchor="ctr"/>
-          <a:lstStyle/>
-          <a:p>
-            <a:pPr marL="0" indent="0">
-              <a:buNone/>
-            </a:pPr>
-            <a:r>
-              <a:rPr lang="en-US" sz="2000" b="1" dirty="0">
+              <a:rPr lang="en-US" sz="1800" b="1" dirty="0">
                 <a:solidFill>
                   <a:srgbClr val="1B3A8A"/>
                 </a:solidFill>
@@ -7220,9 +8068,9 @@
                 <a:ea typeface="Calibri" pitchFamily="34" charset="-122"/>
                 <a:cs typeface="Arial" panose="020B0604020202020204" pitchFamily="34" charset="0"/>
               </a:rPr>
-              <a:t>Conclusion</a:t>
+              <a:t>Live Demo of Project</a:t>
             </a:r>
-            <a:endParaRPr lang="en-US" sz="2000" dirty="0">
+            <a:endParaRPr lang="en-US" sz="1800" dirty="0">
               <a:latin typeface="Lato" panose="020F0502020204030203" pitchFamily="34" charset="0"/>
               <a:cs typeface="Arial" panose="020B0604020202020204" pitchFamily="34" charset="0"/>
             </a:endParaRPr>
@@ -7231,149 +8079,45 @@
       </p:sp>
       <p:sp>
         <p:nvSpPr>
-          <p:cNvPr id="14" name="Text 12"/>
-          <p:cNvSpPr/>
-          <p:nvPr/>
-        </p:nvSpPr>
-        <p:spPr>
-          <a:xfrm>
-            <a:off x="125486" y="1084927"/>
-            <a:ext cx="5178034" cy="3474720"/>
-          </a:xfrm>
-          <a:prstGeom prst="rect">
-            <a:avLst/>
-          </a:prstGeom>
-          <a:noFill/>
-          <a:ln/>
-        </p:spPr>
-        <p:txBody>
-          <a:bodyPr wrap="square" rtlCol="0" anchor="t"/>
-          <a:lstStyle/>
-          <a:p>
-            <a:r>
-              <a:rPr lang="en-IN" sz="1400" dirty="0">
-                <a:latin typeface="Arial" panose="020B0604020202020204" pitchFamily="34" charset="0"/>
-                <a:cs typeface="Arial" panose="020B0604020202020204" pitchFamily="34" charset="0"/>
-              </a:rPr>
-              <a:t>This project addressed the challenge of transforming raw and inconsistent healthcare data into meaningful insights for better decision-making. Using Excel, Power BI, and Microsoft Copilot, the data was cleaned, analysed, and visualized through an interactive dashboard. Key findings included patterns of patient admissions, prevalence of chronic diseases, and identification of high-risk groups. All project objectives were successfully achieved, including data preprocessing, KPI analysis, visualization, and AI integration. The project adds value by demonstrating a practical, data-driven approach to improving healthcare management. This fellowship experience enhanced my skills in data analytics, visualization, and AI-assisted reporting, making it highly relevant and impactful.</a:t>
-            </a:r>
-          </a:p>
-          <a:p>
-            <a:br>
-              <a:rPr lang="en-IN" sz="1400" dirty="0">
-                <a:latin typeface="Arial" panose="020B0604020202020204" pitchFamily="34" charset="0"/>
-                <a:cs typeface="Arial" panose="020B0604020202020204" pitchFamily="34" charset="0"/>
-              </a:rPr>
-            </a:br>
-            <a:endParaRPr lang="en-IN" sz="1400" dirty="0">
-              <a:latin typeface="Arial" panose="020B0604020202020204" pitchFamily="34" charset="0"/>
-              <a:cs typeface="Arial" panose="020B0604020202020204" pitchFamily="34" charset="0"/>
-            </a:endParaRPr>
-          </a:p>
-          <a:p>
-            <a:r>
-              <a:rPr lang="en-IN" sz="1400" dirty="0">
-                <a:latin typeface="Arial" panose="020B0604020202020204" pitchFamily="34" charset="0"/>
-                <a:cs typeface="Arial" panose="020B0604020202020204" pitchFamily="34" charset="0"/>
-              </a:rPr>
-              <a:t> </a:t>
-            </a:r>
-          </a:p>
-          <a:p>
-            <a:pPr marL="0" indent="0">
-              <a:buNone/>
-            </a:pPr>
-            <a:endParaRPr lang="en-US" dirty="0">
-              <a:latin typeface="Lato" panose="020F0502020204030203" pitchFamily="34" charset="0"/>
-              <a:cs typeface="Arial" panose="020B0604020202020204" pitchFamily="34" charset="0"/>
-            </a:endParaRPr>
-          </a:p>
-        </p:txBody>
-      </p:sp>
-      <p:sp>
-        <p:nvSpPr>
-          <p:cNvPr id="19" name="Text 17"/>
-          <p:cNvSpPr/>
-          <p:nvPr/>
-        </p:nvSpPr>
-        <p:spPr>
-          <a:xfrm>
-            <a:off x="5303520" y="3474720"/>
-            <a:ext cx="3017520" cy="502920"/>
-          </a:xfrm>
-          <a:prstGeom prst="rect">
-            <a:avLst/>
-          </a:prstGeom>
-          <a:noFill/>
-          <a:ln/>
-        </p:spPr>
-        <p:txBody>
-          <a:bodyPr wrap="square" rtlCol="0" anchor="ctr"/>
-          <a:lstStyle/>
-          <a:p>
-            <a:pPr marL="0" indent="0" algn="ctr">
-              <a:buNone/>
-            </a:pPr>
-            <a:r>
-              <a:rPr lang="en-US" sz="1600" b="1" kern="0" spc="200" dirty="0">
-                <a:solidFill>
-                  <a:srgbClr val="FFFFFF"/>
-                </a:solidFill>
-                <a:latin typeface="Lato" panose="020F0502020204030203" pitchFamily="34" charset="0"/>
-                <a:ea typeface="Calibri" pitchFamily="34" charset="-122"/>
-                <a:cs typeface="Calibri" pitchFamily="34" charset="-120"/>
-              </a:rPr>
-              <a:t>CONCLUSION</a:t>
-            </a:r>
-            <a:endParaRPr lang="en-US" sz="1600" dirty="0">
-              <a:latin typeface="Lato" panose="020F0502020204030203" pitchFamily="34" charset="0"/>
-            </a:endParaRPr>
-          </a:p>
-        </p:txBody>
-      </p:sp>
-      <p:pic>
-        <p:nvPicPr>
-          <p:cNvPr id="20" name="Picture 19" descr="A blue circle with a pencil and paper with a star on it&#10;&#10;AI-generated content may be incorrect.">
+          <p:cNvPr id="5" name="TextBox 4">
             <a:extLst>
               <a:ext uri="{FF2B5EF4-FFF2-40B4-BE49-F238E27FC236}">
-                <a16:creationId xmlns:a16="http://schemas.microsoft.com/office/drawing/2014/main" id="{BAE68F53-65EE-1751-E92D-7025D978B68E}"/>
+                <a16:creationId xmlns:a16="http://schemas.microsoft.com/office/drawing/2014/main" id="{5F82F99E-08C1-7EE5-BBB8-EFA6DD7899D4}"/>
               </a:ext>
             </a:extLst>
           </p:cNvPr>
-          <p:cNvPicPr>
-            <a:picLocks noChangeAspect="1"/>
-          </p:cNvPicPr>
-          <p:nvPr/>
-        </p:nvPicPr>
-        <p:blipFill>
-          <a:blip r:embed="rId4">
-            <a:duotone>
-              <a:schemeClr val="accent1">
-                <a:shade val="45000"/>
-                <a:satMod val="135000"/>
-              </a:schemeClr>
-              <a:prstClr val="white"/>
-            </a:duotone>
-          </a:blip>
-          <a:srcRect l="25397" t="26296" r="26825" b="29752"/>
-          <a:stretch>
-            <a:fillRect/>
-          </a:stretch>
-        </p:blipFill>
-        <p:spPr>
-          <a:xfrm>
-            <a:off x="4898406" y="971550"/>
-            <a:ext cx="3597456" cy="3309355"/>
+          <p:cNvSpPr txBox="1"/>
+          <p:nvPr/>
+        </p:nvSpPr>
+        <p:spPr>
+          <a:xfrm>
+            <a:off x="4304713" y="2011680"/>
+            <a:ext cx="3706837" cy="1754326"/>
           </a:xfrm>
           <a:prstGeom prst="rect">
             <a:avLst/>
           </a:prstGeom>
-        </p:spPr>
-      </p:pic>
+          <a:noFill/>
+        </p:spPr>
+        <p:txBody>
+          <a:bodyPr wrap="square">
+            <a:spAutoFit/>
+          </a:bodyPr>
+          <a:lstStyle/>
+          <a:p>
+            <a:r>
+              <a:rPr lang="en-US" dirty="0"/>
+              <a:t>This screenshot shows Microsoft Copilot generating insights and summaries from the healthcare dataset using natural language prompts for faster and clearer analysis.</a:t>
+            </a:r>
+          </a:p>
+        </p:txBody>
+      </p:sp>
     </p:spTree>
-    <p:custDataLst>
-      <p:tags r:id="rId1"/>
-    </p:custDataLst>
+    <p:extLst>
+      <p:ext uri="{BB962C8B-B14F-4D97-AF65-F5344CB8AC3E}">
+        <p14:creationId xmlns:p14="http://schemas.microsoft.com/office/powerpoint/2010/main" val="1062620943"/>
+      </p:ext>
+    </p:extLst>
   </p:cSld>
   <p:clrMapOvr>
     <a:masterClrMapping/>

--- a/health_dashboarrd_ppt.pptx
+++ b/health_dashboarrd_ppt.pptx
@@ -146,7 +146,7 @@
 <file path=ppt/revisionInfo.xml><?xml version="1.0" encoding="utf-8"?>
 <p1510:revInfo xmlns:a="http://schemas.openxmlformats.org/drawingml/2006/main" xmlns:r="http://schemas.openxmlformats.org/officeDocument/2006/relationships" xmlns:p1510="http://schemas.microsoft.com/office/powerpoint/2015/10/main">
   <p1510:revLst>
-    <p1510:client id="{700042A6-73B7-4730-9D26-79B5773D29C5}" v="50" dt="2026-04-16T13:05:31.958"/>
+    <p1510:client id="{700042A6-73B7-4730-9D26-79B5773D29C5}" v="55" dt="2026-04-17T12:44:56.417"/>
   </p1510:revLst>
 </p1510:revInfo>
 </file>
@@ -156,7 +156,7 @@
   <pc:docChgLst>
     <pc:chgData name="Sonal Genani" userId="d1fd93578f9e8c8c" providerId="LiveId" clId="{0300D4C8-DA04-4726-B3A2-E37C61829253}"/>
     <pc:docChg chg="undo custSel addSld modSld">
-      <pc:chgData name="Sonal Genani" userId="d1fd93578f9e8c8c" providerId="LiveId" clId="{0300D4C8-DA04-4726-B3A2-E37C61829253}" dt="2026-04-16T13:42:18.350" v="782" actId="1076"/>
+      <pc:chgData name="Sonal Genani" userId="d1fd93578f9e8c8c" providerId="LiveId" clId="{0300D4C8-DA04-4726-B3A2-E37C61829253}" dt="2026-04-17T12:50:34.224" v="1329" actId="20577"/>
       <pc:docMkLst>
         <pc:docMk/>
       </pc:docMkLst>
@@ -216,13 +216,13 @@
         </pc:spChg>
       </pc:sldChg>
       <pc:sldChg chg="modSp mod">
-        <pc:chgData name="Sonal Genani" userId="d1fd93578f9e8c8c" providerId="LiveId" clId="{0300D4C8-DA04-4726-B3A2-E37C61829253}" dt="2026-04-16T13:34:00.429" v="763" actId="255"/>
+        <pc:chgData name="Sonal Genani" userId="d1fd93578f9e8c8c" providerId="LiveId" clId="{0300D4C8-DA04-4726-B3A2-E37C61829253}" dt="2026-04-17T12:31:36.468" v="1096" actId="20577"/>
         <pc:sldMkLst>
           <pc:docMk/>
           <pc:sldMk cId="0" sldId="259"/>
         </pc:sldMkLst>
         <pc:spChg chg="mod">
-          <ac:chgData name="Sonal Genani" userId="d1fd93578f9e8c8c" providerId="LiveId" clId="{0300D4C8-DA04-4726-B3A2-E37C61829253}" dt="2026-04-16T13:34:00.429" v="763" actId="255"/>
+          <ac:chgData name="Sonal Genani" userId="d1fd93578f9e8c8c" providerId="LiveId" clId="{0300D4C8-DA04-4726-B3A2-E37C61829253}" dt="2026-04-17T12:31:36.468" v="1096" actId="20577"/>
           <ac:spMkLst>
             <pc:docMk/>
             <pc:sldMk cId="0" sldId="259"/>
@@ -412,13 +412,13 @@
         </pc:spChg>
       </pc:sldChg>
       <pc:sldChg chg="modSp mod">
-        <pc:chgData name="Sonal Genani" userId="d1fd93578f9e8c8c" providerId="LiveId" clId="{0300D4C8-DA04-4726-B3A2-E37C61829253}" dt="2026-04-05T18:52:20.004" v="132" actId="14100"/>
+        <pc:chgData name="Sonal Genani" userId="d1fd93578f9e8c8c" providerId="LiveId" clId="{0300D4C8-DA04-4726-B3A2-E37C61829253}" dt="2026-04-17T12:50:34.224" v="1329" actId="20577"/>
         <pc:sldMkLst>
           <pc:docMk/>
           <pc:sldMk cId="0" sldId="264"/>
         </pc:sldMkLst>
         <pc:spChg chg="mod">
-          <ac:chgData name="Sonal Genani" userId="d1fd93578f9e8c8c" providerId="LiveId" clId="{0300D4C8-DA04-4726-B3A2-E37C61829253}" dt="2026-04-05T18:52:20.004" v="132" actId="14100"/>
+          <ac:chgData name="Sonal Genani" userId="d1fd93578f9e8c8c" providerId="LiveId" clId="{0300D4C8-DA04-4726-B3A2-E37C61829253}" dt="2026-04-17T12:50:34.224" v="1329" actId="20577"/>
           <ac:spMkLst>
             <pc:docMk/>
             <pc:sldMk cId="0" sldId="264"/>
@@ -4885,34 +4885,63 @@
           <a:bodyPr wrap="square" rtlCol="0" anchor="t"/>
           <a:lstStyle/>
           <a:p>
+            <a:pPr marL="171450" indent="-171450">
+              <a:lnSpc>
+                <a:spcPct val="150000"/>
+              </a:lnSpc>
+              <a:buFont typeface="Arial" panose="020B0604020202020204" pitchFamily="34" charset="0"/>
+              <a:buChar char="•"/>
+            </a:pPr>
             <a:r>
-              <a:rPr lang="en-IN" sz="1400" dirty="0">
+              <a:rPr lang="en-US" sz="1200" dirty="0">
                 <a:latin typeface="Arial" panose="020B0604020202020204" pitchFamily="34" charset="0"/>
                 <a:cs typeface="Arial" panose="020B0604020202020204" pitchFamily="34" charset="0"/>
               </a:rPr>
-              <a:t>This project addressed the challenge of transforming raw and inconsistent healthcare data into meaningful insights for better decision-making. Using Excel, Power BI, and Microsoft Copilot, the data was cleaned, analysed, and visualized through an interactive dashboard. Key findings included patterns of patient admissions, prevalence of chronic diseases, and identification of high-risk groups. All project objectives were successfully achieved, including data preprocessing, KPI analysis, visualization, and AI integration. The project adds value by demonstrating a practical, data-driven approach to improving healthcare management. This fellowship experience enhanced my skills in data analytics, visualization, and AI-assisted reporting, making it highly relevant and impactful.</a:t>
+              <a:t>Fragmented and inconsistent healthcare data is processed to correlate key variables like medical conditions, medications, and test results, affecting accurate assessment of treatment success.</a:t>
             </a:r>
           </a:p>
           <a:p>
-            <a:br>
-              <a:rPr lang="en-IN" sz="1400" dirty="0">
+            <a:pPr marL="171450" indent="-171450">
+              <a:lnSpc>
+                <a:spcPct val="150000"/>
+              </a:lnSpc>
+              <a:buFont typeface="Arial" panose="020B0604020202020204" pitchFamily="34" charset="0"/>
+              <a:buChar char="•"/>
+            </a:pPr>
+            <a:r>
+              <a:rPr lang="en-US" sz="1200" dirty="0">
                 <a:latin typeface="Arial" panose="020B0604020202020204" pitchFamily="34" charset="0"/>
                 <a:cs typeface="Arial" panose="020B0604020202020204" pitchFamily="34" charset="0"/>
               </a:rPr>
-            </a:br>
-            <a:endParaRPr lang="en-IN" sz="1400" dirty="0">
+              <a:t>An interactive dashboard is created for unified patient record across hospitals and departments leads to duplication and incomplete patient history, reducing the quality of care and analysis.</a:t>
+            </a:r>
+          </a:p>
+          <a:p>
+            <a:pPr marL="171450" indent="-171450">
+              <a:lnSpc>
+                <a:spcPct val="150000"/>
+              </a:lnSpc>
+              <a:buFont typeface="Arial" panose="020B0604020202020204" pitchFamily="34" charset="0"/>
+              <a:buChar char="•"/>
+            </a:pPr>
+            <a:r>
+              <a:rPr lang="en-US" sz="1200" dirty="0">
+                <a:latin typeface="Arial" panose="020B0604020202020204" pitchFamily="34" charset="0"/>
+                <a:cs typeface="Arial" panose="020B0604020202020204" pitchFamily="34" charset="0"/>
+              </a:rPr>
+              <a:t>As there are skill gaps among clinical staff which restrict the adoption of analytical tools, this Power BI dashboard would help in training and to enable faster, </a:t>
+            </a:r>
+            <a:r>
+              <a:rPr lang="en-US" sz="1200">
+                <a:latin typeface="Arial" panose="020B0604020202020204" pitchFamily="34" charset="0"/>
+                <a:cs typeface="Arial" panose="020B0604020202020204" pitchFamily="34" charset="0"/>
+              </a:rPr>
+              <a:t>data-driven insights.</a:t>
+            </a:r>
+            <a:endParaRPr lang="en-IN" sz="1200" dirty="0">
               <a:latin typeface="Arial" panose="020B0604020202020204" pitchFamily="34" charset="0"/>
               <a:cs typeface="Arial" panose="020B0604020202020204" pitchFamily="34" charset="0"/>
             </a:endParaRPr>
-          </a:p>
-          <a:p>
-            <a:r>
-              <a:rPr lang="en-IN" sz="1400" dirty="0">
-                <a:latin typeface="Arial" panose="020B0604020202020204" pitchFamily="34" charset="0"/>
-                <a:cs typeface="Arial" panose="020B0604020202020204" pitchFamily="34" charset="0"/>
-              </a:rPr>
-              <a:t> </a:t>
-            </a:r>
           </a:p>
           <a:p>
             <a:pPr marL="0" indent="0">
@@ -6131,7 +6160,7 @@
         <p:spPr>
           <a:xfrm>
             <a:off x="120623" y="1026942"/>
-            <a:ext cx="5471285" cy="2944396"/>
+            <a:ext cx="5471285" cy="3498394"/>
           </a:xfrm>
           <a:prstGeom prst="rect">
             <a:avLst/>
@@ -6144,7 +6173,7 @@
           </a:bodyPr>
           <a:lstStyle/>
           <a:p>
-            <a:pPr marL="171450" indent="-171450">
+            <a:pPr marL="228600" indent="-228600">
               <a:spcAft>
                 <a:spcPts val="800"/>
               </a:spcAft>
@@ -6156,27 +6185,71 @@
             </a:pPr>
             <a:r>
               <a:rPr lang="en-US" sz="1200" dirty="0">
-                <a:latin typeface="Lato" panose="020F0502020204030203" pitchFamily="34" charset="0"/>
+                <a:latin typeface="Arial" panose="020B0604020202020204" pitchFamily="34" charset="0"/>
                 <a:ea typeface="+mn-lt"/>
                 <a:cs typeface="Arial" panose="020B0604020202020204" pitchFamily="34" charset="0"/>
               </a:rPr>
-              <a:t> </a:t>
+              <a:t>Difficulty in correlating variables such as ‘Medical Condition’, ‘Medication’, and ‘Test Results’ to assess treatment success  rates. </a:t>
             </a:r>
+          </a:p>
+          <a:p>
+            <a:pPr marL="228600" indent="-228600">
+              <a:spcAft>
+                <a:spcPts val="800"/>
+              </a:spcAft>
+              <a:buFont typeface="Arial" panose="020B0604020202020204" pitchFamily="34" charset="0"/>
+              <a:buChar char="•"/>
+              <a:tabLst>
+                <a:tab pos="4229100" algn="ctr"/>
+              </a:tabLst>
+            </a:pPr>
             <a:r>
-              <a:rPr lang="en-US" sz="1200" u="sng" dirty="0">
-                <a:latin typeface="Lato" panose="020F0502020204030203" pitchFamily="34" charset="0"/>
+              <a:rPr lang="en-US" sz="1200" dirty="0">
+                <a:latin typeface="Arial" panose="020B0604020202020204" pitchFamily="34" charset="0"/>
                 <a:ea typeface="+mn-lt"/>
                 <a:cs typeface="Arial" panose="020B0604020202020204" pitchFamily="34" charset="0"/>
               </a:rPr>
-              <a:t>Data Issues</a:t>
+              <a:t>Lack of unified view of patient history due to fragmented and duplicate    records across different hospitals and departments.</a:t>
             </a:r>
+          </a:p>
+          <a:p>
+            <a:pPr marL="228600" indent="-228600">
+              <a:spcAft>
+                <a:spcPts val="800"/>
+              </a:spcAft>
+              <a:buFont typeface="Arial" panose="020B0604020202020204" pitchFamily="34" charset="0"/>
+              <a:buChar char="•"/>
+              <a:tabLst>
+                <a:tab pos="4229100" algn="ctr"/>
+              </a:tabLst>
+            </a:pPr>
             <a:r>
               <a:rPr lang="en-US" sz="1200" dirty="0">
-                <a:latin typeface="Lato" panose="020F0502020204030203" pitchFamily="34" charset="0"/>
+                <a:latin typeface="Arial" panose="020B0604020202020204" pitchFamily="34" charset="0"/>
                 <a:ea typeface="+mn-lt"/>
                 <a:cs typeface="Arial" panose="020B0604020202020204" pitchFamily="34" charset="0"/>
               </a:rPr>
-              <a:t>: Unstructured, inconsistent healthcare data limits reliable insights</a:t>
+              <a:t>Organizations struggle in identifying key performance indicators (KPIs) such as bed occupancy rates, emergency admission trends, due to lack of clean, visualized data which leads to underutilization</a:t>
+            </a:r>
+          </a:p>
+          <a:p>
+            <a:pPr marL="228600" indent="-228600">
+              <a:spcAft>
+                <a:spcPts val="800"/>
+              </a:spcAft>
+              <a:buFont typeface="Arial" panose="020B0604020202020204" pitchFamily="34" charset="0"/>
+              <a:buChar char="•"/>
+              <a:tabLst>
+                <a:tab pos="4229100" algn="ctr"/>
+              </a:tabLst>
+            </a:pPr>
+            <a:r>
+              <a:rPr lang="en-US" sz="1200" dirty="0">
+                <a:latin typeface="Arial" panose="020B0604020202020204" pitchFamily="34" charset="0"/>
+                <a:ea typeface="+mn-lt"/>
+                <a:cs typeface="Arial" panose="020B0604020202020204" pitchFamily="34" charset="0"/>
+              </a:rPr>
+              <a:t>Skill gaps amongst clinical staff make it difficult for them to use technology for making analysis faster.</a:t>
             </a:r>
           </a:p>
           <a:p>
@@ -6192,91 +6265,7 @@
             </a:pPr>
             <a:r>
               <a:rPr lang="en-US" sz="1200" u="sng" dirty="0">
-                <a:latin typeface="Lato" panose="020F0502020204030203" pitchFamily="34" charset="0"/>
-                <a:ea typeface="+mn-lt"/>
-                <a:cs typeface="Arial" panose="020B0604020202020204" pitchFamily="34" charset="0"/>
-              </a:rPr>
-              <a:t>Decision Needs</a:t>
-            </a:r>
-            <a:r>
-              <a:rPr lang="en-US" sz="1200" dirty="0">
-                <a:latin typeface="Lato" panose="020F0502020204030203" pitchFamily="34" charset="0"/>
-                <a:ea typeface="+mn-lt"/>
-                <a:cs typeface="Arial" panose="020B0604020202020204" pitchFamily="34" charset="0"/>
-              </a:rPr>
-              <a:t>: Lack of clean, visualized data leads to underutilization</a:t>
-            </a:r>
-          </a:p>
-          <a:p>
-            <a:pPr marL="228600" indent="-228600">
-              <a:spcAft>
-                <a:spcPts val="800"/>
-              </a:spcAft>
-              <a:buFont typeface="Arial" panose="020B0604020202020204" pitchFamily="34" charset="0"/>
-              <a:buChar char="•"/>
-              <a:tabLst>
-                <a:tab pos="4229100" algn="ctr"/>
-              </a:tabLst>
-            </a:pPr>
-            <a:r>
-              <a:rPr lang="en-US" sz="1200" u="sng" dirty="0">
-                <a:latin typeface="Lato" panose="020F0502020204030203" pitchFamily="34" charset="0"/>
-                <a:ea typeface="+mn-lt"/>
-                <a:cs typeface="Arial" panose="020B0604020202020204" pitchFamily="34" charset="0"/>
-              </a:rPr>
-              <a:t>AI Scope</a:t>
-            </a:r>
-            <a:r>
-              <a:rPr lang="en-US" sz="1200" dirty="0">
-                <a:latin typeface="Lato" panose="020F0502020204030203" pitchFamily="34" charset="0"/>
-                <a:ea typeface="+mn-lt"/>
-                <a:cs typeface="Arial" panose="020B0604020202020204" pitchFamily="34" charset="0"/>
-              </a:rPr>
-              <a:t>: Generative AI enables faster analysis; skill gaps hinder adoption</a:t>
-            </a:r>
-          </a:p>
-          <a:p>
-            <a:pPr marL="228600" indent="-228600">
-              <a:spcAft>
-                <a:spcPts val="800"/>
-              </a:spcAft>
-              <a:buFont typeface="Arial" panose="020B0604020202020204" pitchFamily="34" charset="0"/>
-              <a:buChar char="•"/>
-              <a:tabLst>
-                <a:tab pos="4229100" algn="ctr"/>
-              </a:tabLst>
-            </a:pPr>
-            <a:r>
-              <a:rPr lang="en-US" sz="1200" u="sng" dirty="0">
-                <a:latin typeface="Lato" panose="020F0502020204030203" pitchFamily="34" charset="0"/>
-                <a:ea typeface="+mn-lt"/>
-                <a:cs typeface="Arial" panose="020B0604020202020204" pitchFamily="34" charset="0"/>
-              </a:rPr>
-              <a:t>Objectives</a:t>
-            </a:r>
-            <a:r>
-              <a:rPr lang="en-US" sz="1200" dirty="0">
-                <a:latin typeface="Lato" panose="020F0502020204030203" pitchFamily="34" charset="0"/>
-                <a:ea typeface="+mn-lt"/>
-                <a:cs typeface="Arial" panose="020B0604020202020204" pitchFamily="34" charset="0"/>
-              </a:rPr>
-              <a:t>: Data cleaning, analysis, visualization, and AI integration for actionable insights</a:t>
-            </a:r>
-          </a:p>
-          <a:p>
-            <a:pPr marL="228600" indent="-228600">
-              <a:spcAft>
-                <a:spcPts val="800"/>
-              </a:spcAft>
-              <a:buFont typeface="Arial" panose="020B0604020202020204" pitchFamily="34" charset="0"/>
-              <a:buChar char="•"/>
-              <a:tabLst>
-                <a:tab pos="4229100" algn="ctr"/>
-              </a:tabLst>
-            </a:pPr>
-            <a:r>
-              <a:rPr lang="en-US" sz="1200" u="sng" dirty="0">
-                <a:latin typeface="Lato" panose="020F0502020204030203" pitchFamily="34" charset="0"/>
+                <a:latin typeface="Arial" panose="020B0604020202020204" pitchFamily="34" charset="0"/>
                 <a:ea typeface="+mn-lt"/>
                 <a:cs typeface="Arial" panose="020B0604020202020204" pitchFamily="34" charset="0"/>
               </a:rPr>
@@ -6296,7 +6285,7 @@
             </a:pPr>
             <a:r>
               <a:rPr lang="en-US" sz="1200" dirty="0">
-                <a:latin typeface="Lato" panose="020F0502020204030203" pitchFamily="34" charset="0"/>
+                <a:latin typeface="Arial" panose="020B0604020202020204" pitchFamily="34" charset="0"/>
                 <a:ea typeface="+mn-lt"/>
                 <a:cs typeface="Arial" panose="020B0604020202020204" pitchFamily="34" charset="0"/>
               </a:rPr>
@@ -6316,7 +6305,7 @@
             </a:pPr>
             <a:r>
               <a:rPr lang="en-US" sz="1200" dirty="0">
-                <a:latin typeface="Lato" panose="020F0502020204030203" pitchFamily="34" charset="0"/>
+                <a:latin typeface="Arial" panose="020B0604020202020204" pitchFamily="34" charset="0"/>
                 <a:ea typeface="+mn-lt"/>
                 <a:cs typeface="Arial" panose="020B0604020202020204" pitchFamily="34" charset="0"/>
               </a:rPr>
@@ -6336,7 +6325,7 @@
             </a:pPr>
             <a:r>
               <a:rPr lang="en-US" sz="1200" dirty="0">
-                <a:latin typeface="Lato" panose="020F0502020204030203" pitchFamily="34" charset="0"/>
+                <a:latin typeface="Arial" panose="020B0604020202020204" pitchFamily="34" charset="0"/>
                 <a:ea typeface="+mn-lt"/>
                 <a:cs typeface="Arial" panose="020B0604020202020204" pitchFamily="34" charset="0"/>
               </a:rPr>
@@ -6356,7 +6345,7 @@
             </a:pPr>
             <a:r>
               <a:rPr lang="en-US" sz="1200" dirty="0">
-                <a:latin typeface="Lato" panose="020F0502020204030203" pitchFamily="34" charset="0"/>
+                <a:latin typeface="Arial" panose="020B0604020202020204" pitchFamily="34" charset="0"/>
                 <a:ea typeface="+mn-lt"/>
                 <a:cs typeface="Arial" panose="020B0604020202020204" pitchFamily="34" charset="0"/>
               </a:rPr>
